--- a/PPT/Project 2 - Group 7 (Barsha, Julia, Maximilian).pptx
+++ b/PPT/Project 2 - Group 7 (Barsha, Julia, Maximilian).pptx
@@ -19,16 +19,17 @@
     <p:sldId id="264" r:id="rId14"/>
     <p:sldId id="265" r:id="rId15"/>
     <p:sldId id="266" r:id="rId16"/>
+    <p:sldId id="267" r:id="rId17"/>
   </p:sldIdLst>
   <p:sldSz cy="6858000" cx="12192000"/>
   <p:notesSz cx="6858000" cy="9144000"/>
   <p:embeddedFontLst>
     <p:embeddedFont>
       <p:font typeface="Plus Jakarta Sans"/>
-      <p:regular r:id="rId17"/>
-      <p:bold r:id="rId18"/>
-      <p:italic r:id="rId19"/>
-      <p:boldItalic r:id="rId20"/>
+      <p:regular r:id="rId18"/>
+      <p:bold r:id="rId19"/>
+      <p:italic r:id="rId20"/>
+      <p:boldItalic r:id="rId21"/>
     </p:embeddedFont>
   </p:embeddedFontLst>
   <p:defaultTextStyle>
@@ -276,7 +277,7 @@
       </p15:sldGuideLst>
     </p:ext>
     <p:ext uri="GoogleSlidesCustomDataVersion2">
-      <go:slidesCustomData xmlns:go="http://customooxmlschemas.google.com/" r:id="rId21" roundtripDataSignature="AMtx7mhFOHUXOAtzyQwWbomkAZCcX3D3GA=="/>
+      <go:slidesCustomData xmlns:go="http://customooxmlschemas.google.com/" r:id="rId22" roundtripDataSignature="AMtx7mgakcz9N0JcCQaeM7QX7382pDFIzw=="/>
     </p:ext>
   </p:extLst>
 </p:presentation>
@@ -812,7 +813,7 @@
   <p:cSld>
     <p:spTree>
       <p:nvGrpSpPr>
-        <p:cNvPr id="193" name="Shape 193"/>
+        <p:cNvPr id="195" name="Shape 195"/>
         <p:cNvGrpSpPr/>
         <p:nvPr/>
       </p:nvGrpSpPr>
@@ -826,7 +827,7 @@
       </p:grpSpPr>
       <p:sp>
         <p:nvSpPr>
-          <p:cNvPr id="194" name="Google Shape;194;p10:notes"/>
+          <p:cNvPr id="196" name="Google Shape;196;p9:notes"/>
           <p:cNvSpPr txBox="1"/>
           <p:nvPr>
             <p:ph idx="1" type="body"/>
@@ -865,7 +866,7 @@
       </p:sp>
       <p:sp>
         <p:nvSpPr>
-          <p:cNvPr id="195" name="Google Shape;195;p10:notes"/>
+          <p:cNvPr id="197" name="Google Shape;197;p9:notes"/>
           <p:cNvSpPr/>
           <p:nvPr>
             <p:ph idx="2" type="sldImg"/>
@@ -911,7 +912,7 @@
   <p:cSld>
     <p:spTree>
       <p:nvGrpSpPr>
-        <p:cNvPr id="213" name="Shape 213"/>
+        <p:cNvPr id="216" name="Shape 216"/>
         <p:cNvGrpSpPr/>
         <p:nvPr/>
       </p:nvGrpSpPr>
@@ -925,7 +926,7 @@
       </p:grpSpPr>
       <p:sp>
         <p:nvSpPr>
-          <p:cNvPr id="214" name="Google Shape;214;p11:notes"/>
+          <p:cNvPr id="217" name="Google Shape;217;p10:notes"/>
           <p:cNvSpPr txBox="1"/>
           <p:nvPr>
             <p:ph idx="1" type="body"/>
@@ -964,7 +965,106 @@
       </p:sp>
       <p:sp>
         <p:nvSpPr>
-          <p:cNvPr id="215" name="Google Shape;215;p11:notes"/>
+          <p:cNvPr id="218" name="Google Shape;218;p10:notes"/>
+          <p:cNvSpPr/>
+          <p:nvPr>
+            <p:ph idx="2" type="sldImg"/>
+          </p:nvPr>
+        </p:nvSpPr>
+        <p:spPr>
+          <a:xfrm>
+            <a:off x="1143225" y="685800"/>
+            <a:ext cx="4572225" cy="3429000"/>
+          </a:xfrm>
+          <a:custGeom>
+            <a:rect b="b" l="l" r="r" t="t"/>
+            <a:pathLst>
+              <a:path extrusionOk="0" h="120000" w="120000">
+                <a:moveTo>
+                  <a:pt x="0" y="0"/>
+                </a:moveTo>
+                <a:lnTo>
+                  <a:pt x="120000" y="0"/>
+                </a:lnTo>
+                <a:lnTo>
+                  <a:pt x="120000" y="120000"/>
+                </a:lnTo>
+                <a:lnTo>
+                  <a:pt x="0" y="120000"/>
+                </a:lnTo>
+                <a:close/>
+              </a:path>
+            </a:pathLst>
+          </a:custGeom>
+        </p:spPr>
+      </p:sp>
+    </p:spTree>
+  </p:cSld>
+  <p:clrMapOvr>
+    <a:masterClrMapping/>
+  </p:clrMapOvr>
+</p:notes>
+</file>
+
+<file path=ppt/notesSlides/notesSlide12.xml><?xml version="1.0" encoding="utf-8"?>
+<p:notes xmlns:a="http://schemas.openxmlformats.org/drawingml/2006/main" xmlns:r="http://schemas.openxmlformats.org/officeDocument/2006/relationships" xmlns:mc="http://schemas.openxmlformats.org/markup-compatibility/2006" xmlns:mv="urn:schemas-microsoft-com:mac:vml" xmlns:p="http://schemas.openxmlformats.org/presentationml/2006/main" xmlns:c="http://schemas.openxmlformats.org/drawingml/2006/chart" xmlns:dgm="http://schemas.openxmlformats.org/drawingml/2006/diagram" xmlns:o="urn:schemas-microsoft-com:office:office" xmlns:v="urn:schemas-microsoft-com:vml" xmlns:pvml="urn:schemas-microsoft-com:office:powerpoint" xmlns:com="http://schemas.openxmlformats.org/drawingml/2006/compatibility" xmlns:p14="http://schemas.microsoft.com/office/powerpoint/2010/main" xmlns:p15="http://schemas.microsoft.com/office/powerpoint/2012/main" xmlns:ahyp="http://schemas.microsoft.com/office/drawing/2018/hyperlinkcolor" showMasterPhAnim="0" showMasterSp="0">
+  <p:cSld>
+    <p:spTree>
+      <p:nvGrpSpPr>
+        <p:cNvPr id="236" name="Shape 236"/>
+        <p:cNvGrpSpPr/>
+        <p:nvPr/>
+      </p:nvGrpSpPr>
+      <p:grpSpPr>
+        <a:xfrm>
+          <a:off x="0" y="0"/>
+          <a:ext cx="0" cy="0"/>
+          <a:chOff x="0" y="0"/>
+          <a:chExt cx="0" cy="0"/>
+        </a:xfrm>
+      </p:grpSpPr>
+      <p:sp>
+        <p:nvSpPr>
+          <p:cNvPr id="237" name="Google Shape;237;p11:notes"/>
+          <p:cNvSpPr txBox="1"/>
+          <p:nvPr>
+            <p:ph idx="1" type="body"/>
+          </p:nvPr>
+        </p:nvSpPr>
+        <p:spPr>
+          <a:xfrm>
+            <a:off x="685800" y="4343400"/>
+            <a:ext cx="5486400" cy="4114800"/>
+          </a:xfrm>
+          <a:prstGeom prst="rect">
+            <a:avLst/>
+          </a:prstGeom>
+        </p:spPr>
+        <p:txBody>
+          <a:bodyPr anchorCtr="0" anchor="t" bIns="91425" lIns="91425" spcFirstLastPara="1" rIns="91425" wrap="square" tIns="91425">
+            <a:noAutofit/>
+          </a:bodyPr>
+          <a:lstStyle/>
+          <a:p>
+            <a:pPr indent="0" lvl="0" marL="0" rtl="0" algn="l">
+              <a:spcBef>
+                <a:spcPts val="0"/>
+              </a:spcBef>
+              <a:spcAft>
+                <a:spcPts val="0"/>
+              </a:spcAft>
+              <a:buNone/>
+            </a:pPr>
+            <a:r>
+              <a:t/>
+            </a:r>
+            <a:endParaRPr/>
+          </a:p>
+        </p:txBody>
+      </p:sp>
+      <p:sp>
+        <p:nvSpPr>
+          <p:cNvPr id="238" name="Google Shape;238;p11:notes"/>
           <p:cNvSpPr/>
           <p:nvPr>
             <p:ph idx="2" type="sldImg"/>
@@ -1109,7 +1209,7 @@
   <p:cSld>
     <p:spTree>
       <p:nvGrpSpPr>
-        <p:cNvPr id="102" name="Shape 102"/>
+        <p:cNvPr id="106" name="Shape 106"/>
         <p:cNvGrpSpPr/>
         <p:nvPr/>
       </p:nvGrpSpPr>
@@ -1123,7 +1223,7 @@
       </p:grpSpPr>
       <p:sp>
         <p:nvSpPr>
-          <p:cNvPr id="103" name="Google Shape;103;p3:notes"/>
+          <p:cNvPr id="107" name="Google Shape;107;p3:notes"/>
           <p:cNvSpPr txBox="1"/>
           <p:nvPr>
             <p:ph idx="1" type="body"/>
@@ -1162,7 +1262,7 @@
       </p:sp>
       <p:sp>
         <p:nvSpPr>
-          <p:cNvPr id="104" name="Google Shape;104;p3:notes"/>
+          <p:cNvPr id="108" name="Google Shape;108;p3:notes"/>
           <p:cNvSpPr/>
           <p:nvPr>
             <p:ph idx="2" type="sldImg"/>
@@ -1208,7 +1308,7 @@
   <p:cSld>
     <p:spTree>
       <p:nvGrpSpPr>
-        <p:cNvPr id="119" name="Shape 119"/>
+        <p:cNvPr id="123" name="Shape 123"/>
         <p:cNvGrpSpPr/>
         <p:nvPr/>
       </p:nvGrpSpPr>
@@ -1222,7 +1322,7 @@
       </p:grpSpPr>
       <p:sp>
         <p:nvSpPr>
-          <p:cNvPr id="120" name="Google Shape;120;h1051ff8d553358a1_0_47:notes"/>
+          <p:cNvPr id="124" name="Google Shape;124;h1051ff8d553358a1_0_47:notes"/>
           <p:cNvSpPr txBox="1"/>
           <p:nvPr>
             <p:ph idx="1" type="body"/>
@@ -1261,7 +1361,7 @@
       </p:sp>
       <p:sp>
         <p:nvSpPr>
-          <p:cNvPr id="121" name="Google Shape;121;h1051ff8d553358a1_0_47:notes"/>
+          <p:cNvPr id="125" name="Google Shape;125;h1051ff8d553358a1_0_47:notes"/>
           <p:cNvSpPr/>
           <p:nvPr>
             <p:ph idx="2" type="sldImg"/>
@@ -1307,7 +1407,7 @@
   <p:cSld>
     <p:spTree>
       <p:nvGrpSpPr>
-        <p:cNvPr id="138" name="Shape 138"/>
+        <p:cNvPr id="142" name="Shape 142"/>
         <p:cNvGrpSpPr/>
         <p:nvPr/>
       </p:nvGrpSpPr>
@@ -1321,7 +1421,7 @@
       </p:grpSpPr>
       <p:sp>
         <p:nvSpPr>
-          <p:cNvPr id="139" name="Google Shape;139;p4:notes"/>
+          <p:cNvPr id="143" name="Google Shape;143;p4:notes"/>
           <p:cNvSpPr txBox="1"/>
           <p:nvPr>
             <p:ph idx="1" type="body"/>
@@ -1360,7 +1460,7 @@
       </p:sp>
       <p:sp>
         <p:nvSpPr>
-          <p:cNvPr id="140" name="Google Shape;140;p4:notes"/>
+          <p:cNvPr id="144" name="Google Shape;144;p4:notes"/>
           <p:cNvSpPr/>
           <p:nvPr>
             <p:ph idx="2" type="sldImg"/>
@@ -1406,7 +1506,7 @@
   <p:cSld>
     <p:spTree>
       <p:nvGrpSpPr>
-        <p:cNvPr id="152" name="Shape 152"/>
+        <p:cNvPr id="157" name="Shape 157"/>
         <p:cNvGrpSpPr/>
         <p:nvPr/>
       </p:nvGrpSpPr>
@@ -1420,7 +1520,42 @@
       </p:grpSpPr>
       <p:sp>
         <p:nvSpPr>
-          <p:cNvPr id="153" name="Google Shape;153;p6:notes"/>
+          <p:cNvPr id="158" name="Google Shape;158;h1d6895f2cb059417_2_0:notes"/>
+          <p:cNvSpPr/>
+          <p:nvPr>
+            <p:ph idx="2" type="sldImg"/>
+          </p:nvPr>
+        </p:nvSpPr>
+        <p:spPr>
+          <a:xfrm>
+            <a:off x="1143225" y="685800"/>
+            <a:ext cx="4572300" cy="3429000"/>
+          </a:xfrm>
+          <a:custGeom>
+            <a:rect b="b" l="l" r="r" t="t"/>
+            <a:pathLst>
+              <a:path extrusionOk="0" h="120000" w="120000">
+                <a:moveTo>
+                  <a:pt x="0" y="0"/>
+                </a:moveTo>
+                <a:lnTo>
+                  <a:pt x="120000" y="0"/>
+                </a:lnTo>
+                <a:lnTo>
+                  <a:pt x="120000" y="120000"/>
+                </a:lnTo>
+                <a:lnTo>
+                  <a:pt x="0" y="120000"/>
+                </a:lnTo>
+                <a:close/>
+              </a:path>
+            </a:pathLst>
+          </a:custGeom>
+        </p:spPr>
+      </p:sp>
+      <p:sp>
+        <p:nvSpPr>
+          <p:cNvPr id="159" name="Google Shape;159;h1d6895f2cb059417_2_0:notes"/>
           <p:cNvSpPr txBox="1"/>
           <p:nvPr>
             <p:ph idx="1" type="body"/>
@@ -1457,9 +1592,73 @@
           </a:p>
         </p:txBody>
       </p:sp>
+    </p:spTree>
+  </p:cSld>
+  <p:clrMapOvr>
+    <a:masterClrMapping/>
+  </p:clrMapOvr>
+</p:notes>
+</file>
+
+<file path=ppt/notesSlides/notesSlide7.xml><?xml version="1.0" encoding="utf-8"?>
+<p:notes xmlns:a="http://schemas.openxmlformats.org/drawingml/2006/main" xmlns:r="http://schemas.openxmlformats.org/officeDocument/2006/relationships" xmlns:mc="http://schemas.openxmlformats.org/markup-compatibility/2006" xmlns:mv="urn:schemas-microsoft-com:mac:vml" xmlns:p="http://schemas.openxmlformats.org/presentationml/2006/main" xmlns:c="http://schemas.openxmlformats.org/drawingml/2006/chart" xmlns:dgm="http://schemas.openxmlformats.org/drawingml/2006/diagram" xmlns:o="urn:schemas-microsoft-com:office:office" xmlns:v="urn:schemas-microsoft-com:vml" xmlns:pvml="urn:schemas-microsoft-com:office:powerpoint" xmlns:com="http://schemas.openxmlformats.org/drawingml/2006/compatibility" xmlns:p14="http://schemas.microsoft.com/office/powerpoint/2010/main" xmlns:p15="http://schemas.microsoft.com/office/powerpoint/2012/main" xmlns:ahyp="http://schemas.microsoft.com/office/drawing/2018/hyperlinkcolor" showMasterPhAnim="0" showMasterSp="0">
+  <p:cSld>
+    <p:spTree>
+      <p:nvGrpSpPr>
+        <p:cNvPr id="175" name="Shape 175"/>
+        <p:cNvGrpSpPr/>
+        <p:nvPr/>
+      </p:nvGrpSpPr>
+      <p:grpSpPr>
+        <a:xfrm>
+          <a:off x="0" y="0"/>
+          <a:ext cx="0" cy="0"/>
+          <a:chOff x="0" y="0"/>
+          <a:chExt cx="0" cy="0"/>
+        </a:xfrm>
+      </p:grpSpPr>
       <p:sp>
         <p:nvSpPr>
-          <p:cNvPr id="154" name="Google Shape;154;p6:notes"/>
+          <p:cNvPr id="176" name="Google Shape;176;p6:notes"/>
+          <p:cNvSpPr txBox="1"/>
+          <p:nvPr>
+            <p:ph idx="1" type="body"/>
+          </p:nvPr>
+        </p:nvSpPr>
+        <p:spPr>
+          <a:xfrm>
+            <a:off x="685800" y="4343400"/>
+            <a:ext cx="5486400" cy="4114800"/>
+          </a:xfrm>
+          <a:prstGeom prst="rect">
+            <a:avLst/>
+          </a:prstGeom>
+        </p:spPr>
+        <p:txBody>
+          <a:bodyPr anchorCtr="0" anchor="t" bIns="91425" lIns="91425" spcFirstLastPara="1" rIns="91425" wrap="square" tIns="91425">
+            <a:noAutofit/>
+          </a:bodyPr>
+          <a:lstStyle/>
+          <a:p>
+            <a:pPr indent="0" lvl="0" marL="0" rtl="0" algn="l">
+              <a:spcBef>
+                <a:spcPts val="0"/>
+              </a:spcBef>
+              <a:spcAft>
+                <a:spcPts val="0"/>
+              </a:spcAft>
+              <a:buNone/>
+            </a:pPr>
+            <a:r>
+              <a:t/>
+            </a:r>
+            <a:endParaRPr/>
+          </a:p>
+        </p:txBody>
+      </p:sp>
+      <p:sp>
+        <p:nvSpPr>
+          <p:cNvPr id="177" name="Google Shape;177;p6:notes"/>
           <p:cNvSpPr/>
           <p:nvPr>
             <p:ph idx="2" type="sldImg"/>
@@ -1500,12 +1699,12 @@
 </p:notes>
 </file>
 
-<file path=ppt/notesSlides/notesSlide7.xml><?xml version="1.0" encoding="utf-8"?>
+<file path=ppt/notesSlides/notesSlide8.xml><?xml version="1.0" encoding="utf-8"?>
 <p:notes xmlns:a="http://schemas.openxmlformats.org/drawingml/2006/main" xmlns:r="http://schemas.openxmlformats.org/officeDocument/2006/relationships" xmlns:mc="http://schemas.openxmlformats.org/markup-compatibility/2006" xmlns:mv="urn:schemas-microsoft-com:mac:vml" xmlns:p="http://schemas.openxmlformats.org/presentationml/2006/main" xmlns:c="http://schemas.openxmlformats.org/drawingml/2006/chart" xmlns:dgm="http://schemas.openxmlformats.org/drawingml/2006/diagram" xmlns:o="urn:schemas-microsoft-com:office:office" xmlns:v="urn:schemas-microsoft-com:vml" xmlns:pvml="urn:schemas-microsoft-com:office:powerpoint" xmlns:com="http://schemas.openxmlformats.org/drawingml/2006/compatibility" xmlns:p14="http://schemas.microsoft.com/office/powerpoint/2010/main" xmlns:p15="http://schemas.microsoft.com/office/powerpoint/2012/main" xmlns:ahyp="http://schemas.microsoft.com/office/drawing/2018/hyperlinkcolor" showMasterPhAnim="0" showMasterSp="0">
   <p:cSld>
     <p:spTree>
       <p:nvGrpSpPr>
-        <p:cNvPr id="159" name="Shape 159"/>
+        <p:cNvPr id="182" name="Shape 182"/>
         <p:cNvGrpSpPr/>
         <p:nvPr/>
       </p:nvGrpSpPr>
@@ -1519,7 +1718,7 @@
       </p:grpSpPr>
       <p:sp>
         <p:nvSpPr>
-          <p:cNvPr id="160" name="Google Shape;160;h112f3c18fd02c57c_0_33:notes"/>
+          <p:cNvPr id="183" name="Google Shape;183;h112f3c18fd02c57c_0_33:notes"/>
           <p:cNvSpPr/>
           <p:nvPr>
             <p:ph idx="2" type="sldImg"/>
@@ -1554,7 +1753,7 @@
       </p:sp>
       <p:sp>
         <p:nvSpPr>
-          <p:cNvPr id="161" name="Google Shape;161;h112f3c18fd02c57c_0_33:notes"/>
+          <p:cNvPr id="184" name="Google Shape;184;h112f3c18fd02c57c_0_33:notes"/>
           <p:cNvSpPr txBox="1"/>
           <p:nvPr>
             <p:ph idx="1" type="body"/>
@@ -1599,12 +1798,12 @@
 </p:notes>
 </file>
 
-<file path=ppt/notesSlides/notesSlide8.xml><?xml version="1.0" encoding="utf-8"?>
+<file path=ppt/notesSlides/notesSlide9.xml><?xml version="1.0" encoding="utf-8"?>
 <p:notes xmlns:a="http://schemas.openxmlformats.org/drawingml/2006/main" xmlns:r="http://schemas.openxmlformats.org/officeDocument/2006/relationships" xmlns:mc="http://schemas.openxmlformats.org/markup-compatibility/2006" xmlns:mv="urn:schemas-microsoft-com:mac:vml" xmlns:p="http://schemas.openxmlformats.org/presentationml/2006/main" xmlns:c="http://schemas.openxmlformats.org/drawingml/2006/chart" xmlns:dgm="http://schemas.openxmlformats.org/drawingml/2006/diagram" xmlns:o="urn:schemas-microsoft-com:office:office" xmlns:v="urn:schemas-microsoft-com:vml" xmlns:pvml="urn:schemas-microsoft-com:office:powerpoint" xmlns:com="http://schemas.openxmlformats.org/drawingml/2006/compatibility" xmlns:p14="http://schemas.microsoft.com/office/powerpoint/2010/main" xmlns:p15="http://schemas.microsoft.com/office/powerpoint/2012/main" xmlns:ahyp="http://schemas.microsoft.com/office/drawing/2018/hyperlinkcolor" showMasterPhAnim="0" showMasterSp="0">
   <p:cSld>
     <p:spTree>
       <p:nvGrpSpPr>
-        <p:cNvPr id="164" name="Shape 164"/>
+        <p:cNvPr id="187" name="Shape 187"/>
         <p:cNvGrpSpPr/>
         <p:nvPr/>
       </p:nvGrpSpPr>
@@ -1618,7 +1817,7 @@
       </p:grpSpPr>
       <p:sp>
         <p:nvSpPr>
-          <p:cNvPr id="165" name="Google Shape;165;h112f3c18fd02c57c_0_3:notes"/>
+          <p:cNvPr id="188" name="Google Shape;188;h112f3c18fd02c57c_0_3:notes"/>
           <p:cNvSpPr txBox="1"/>
           <p:nvPr>
             <p:ph idx="1" type="body"/>
@@ -1657,7 +1856,7 @@
       </p:sp>
       <p:sp>
         <p:nvSpPr>
-          <p:cNvPr id="166" name="Google Shape;166;h112f3c18fd02c57c_0_3:notes"/>
+          <p:cNvPr id="189" name="Google Shape;189;h112f3c18fd02c57c_0_3:notes"/>
           <p:cNvSpPr/>
           <p:nvPr>
             <p:ph idx="2" type="sldImg"/>
@@ -1667,105 +1866,6 @@
           <a:xfrm>
             <a:off x="1143225" y="685800"/>
             <a:ext cx="4572300" cy="3429000"/>
-          </a:xfrm>
-          <a:custGeom>
-            <a:rect b="b" l="l" r="r" t="t"/>
-            <a:pathLst>
-              <a:path extrusionOk="0" h="120000" w="120000">
-                <a:moveTo>
-                  <a:pt x="0" y="0"/>
-                </a:moveTo>
-                <a:lnTo>
-                  <a:pt x="120000" y="0"/>
-                </a:lnTo>
-                <a:lnTo>
-                  <a:pt x="120000" y="120000"/>
-                </a:lnTo>
-                <a:lnTo>
-                  <a:pt x="0" y="120000"/>
-                </a:lnTo>
-                <a:close/>
-              </a:path>
-            </a:pathLst>
-          </a:custGeom>
-        </p:spPr>
-      </p:sp>
-    </p:spTree>
-  </p:cSld>
-  <p:clrMapOvr>
-    <a:masterClrMapping/>
-  </p:clrMapOvr>
-</p:notes>
-</file>
-
-<file path=ppt/notesSlides/notesSlide9.xml><?xml version="1.0" encoding="utf-8"?>
-<p:notes xmlns:a="http://schemas.openxmlformats.org/drawingml/2006/main" xmlns:r="http://schemas.openxmlformats.org/officeDocument/2006/relationships" xmlns:mc="http://schemas.openxmlformats.org/markup-compatibility/2006" xmlns:mv="urn:schemas-microsoft-com:mac:vml" xmlns:p="http://schemas.openxmlformats.org/presentationml/2006/main" xmlns:c="http://schemas.openxmlformats.org/drawingml/2006/chart" xmlns:dgm="http://schemas.openxmlformats.org/drawingml/2006/diagram" xmlns:o="urn:schemas-microsoft-com:office:office" xmlns:v="urn:schemas-microsoft-com:vml" xmlns:pvml="urn:schemas-microsoft-com:office:powerpoint" xmlns:com="http://schemas.openxmlformats.org/drawingml/2006/compatibility" xmlns:p14="http://schemas.microsoft.com/office/powerpoint/2010/main" xmlns:p15="http://schemas.microsoft.com/office/powerpoint/2012/main" xmlns:ahyp="http://schemas.microsoft.com/office/drawing/2018/hyperlinkcolor" showMasterPhAnim="0" showMasterSp="0">
-  <p:cSld>
-    <p:spTree>
-      <p:nvGrpSpPr>
-        <p:cNvPr id="172" name="Shape 172"/>
-        <p:cNvGrpSpPr/>
-        <p:nvPr/>
-      </p:nvGrpSpPr>
-      <p:grpSpPr>
-        <a:xfrm>
-          <a:off x="0" y="0"/>
-          <a:ext cx="0" cy="0"/>
-          <a:chOff x="0" y="0"/>
-          <a:chExt cx="0" cy="0"/>
-        </a:xfrm>
-      </p:grpSpPr>
-      <p:sp>
-        <p:nvSpPr>
-          <p:cNvPr id="173" name="Google Shape;173;p9:notes"/>
-          <p:cNvSpPr txBox="1"/>
-          <p:nvPr>
-            <p:ph idx="1" type="body"/>
-          </p:nvPr>
-        </p:nvSpPr>
-        <p:spPr>
-          <a:xfrm>
-            <a:off x="685800" y="4343400"/>
-            <a:ext cx="5486400" cy="4114800"/>
-          </a:xfrm>
-          <a:prstGeom prst="rect">
-            <a:avLst/>
-          </a:prstGeom>
-        </p:spPr>
-        <p:txBody>
-          <a:bodyPr anchorCtr="0" anchor="t" bIns="91425" lIns="91425" spcFirstLastPara="1" rIns="91425" wrap="square" tIns="91425">
-            <a:noAutofit/>
-          </a:bodyPr>
-          <a:lstStyle/>
-          <a:p>
-            <a:pPr indent="0" lvl="0" marL="0" rtl="0" algn="l">
-              <a:spcBef>
-                <a:spcPts val="0"/>
-              </a:spcBef>
-              <a:spcAft>
-                <a:spcPts val="0"/>
-              </a:spcAft>
-              <a:buNone/>
-            </a:pPr>
-            <a:r>
-              <a:t/>
-            </a:r>
-            <a:endParaRPr/>
-          </a:p>
-        </p:txBody>
-      </p:sp>
-      <p:sp>
-        <p:nvSpPr>
-          <p:cNvPr id="174" name="Google Shape;174;p9:notes"/>
-          <p:cNvSpPr/>
-          <p:nvPr>
-            <p:ph idx="2" type="sldImg"/>
-          </p:nvPr>
-        </p:nvSpPr>
-        <p:spPr>
-          <a:xfrm>
-            <a:off x="1143225" y="685800"/>
-            <a:ext cx="4572225" cy="3429000"/>
           </a:xfrm>
           <a:custGeom>
             <a:rect b="b" l="l" r="r" t="t"/>
@@ -11592,13 +11692,13 @@
     <p:bg>
       <p:bgPr>
         <a:solidFill>
-          <a:srgbClr val="FFFFFF"/>
+          <a:srgbClr val="F8FAFC"/>
         </a:solidFill>
       </p:bgPr>
     </p:bg>
     <p:spTree>
       <p:nvGrpSpPr>
-        <p:cNvPr id="196" name="Shape 196"/>
+        <p:cNvPr id="198" name="Shape 198"/>
         <p:cNvGrpSpPr/>
         <p:nvPr/>
       </p:nvGrpSpPr>
@@ -11612,7 +11712,919 @@
       </p:grpSpPr>
       <p:sp>
         <p:nvSpPr>
-          <p:cNvPr id="197" name="Google Shape;197;p10"/>
+          <p:cNvPr id="199" name="Google Shape;199;p9"/>
+          <p:cNvSpPr/>
+          <p:nvPr/>
+        </p:nvSpPr>
+        <p:spPr>
+          <a:xfrm>
+            <a:off x="1333500" y="2143125"/>
+            <a:ext cx="4457700" cy="19050"/>
+          </a:xfrm>
+          <a:prstGeom prst="rect">
+            <a:avLst/>
+          </a:prstGeom>
+          <a:solidFill>
+            <a:srgbClr val="EF4444"/>
+          </a:solidFill>
+          <a:ln>
+            <a:noFill/>
+          </a:ln>
+        </p:spPr>
+        <p:txBody>
+          <a:bodyPr anchorCtr="0" anchor="ctr" bIns="45700" lIns="91425" spcFirstLastPara="1" rIns="91425" wrap="square" tIns="45700">
+            <a:noAutofit/>
+          </a:bodyPr>
+          <a:lstStyle/>
+          <a:p>
+            <a:pPr indent="0" lvl="0" marL="0" marR="0" rtl="0" algn="ctr">
+              <a:spcBef>
+                <a:spcPts val="0"/>
+              </a:spcBef>
+              <a:spcAft>
+                <a:spcPts val="0"/>
+              </a:spcAft>
+              <a:buNone/>
+            </a:pPr>
+            <a:r>
+              <a:t/>
+            </a:r>
+            <a:endParaRPr b="0" i="0" sz="1800" u="none" cap="none" strike="noStrike">
+              <a:solidFill>
+                <a:schemeClr val="dk1"/>
+              </a:solidFill>
+              <a:latin typeface="Calibri"/>
+              <a:ea typeface="Calibri"/>
+              <a:cs typeface="Calibri"/>
+              <a:sym typeface="Calibri"/>
+            </a:endParaRPr>
+          </a:p>
+        </p:txBody>
+      </p:sp>
+      <p:sp>
+        <p:nvSpPr>
+          <p:cNvPr id="200" name="Google Shape;200;p9"/>
+          <p:cNvSpPr/>
+          <p:nvPr/>
+        </p:nvSpPr>
+        <p:spPr>
+          <a:xfrm>
+            <a:off x="6400800" y="2143125"/>
+            <a:ext cx="4457700" cy="19050"/>
+          </a:xfrm>
+          <a:prstGeom prst="rect">
+            <a:avLst/>
+          </a:prstGeom>
+          <a:solidFill>
+            <a:srgbClr val="6DACBE"/>
+          </a:solidFill>
+          <a:ln>
+            <a:noFill/>
+          </a:ln>
+        </p:spPr>
+        <p:txBody>
+          <a:bodyPr anchorCtr="0" anchor="ctr" bIns="45700" lIns="91425" spcFirstLastPara="1" rIns="91425" wrap="square" tIns="45700">
+            <a:noAutofit/>
+          </a:bodyPr>
+          <a:lstStyle/>
+          <a:p>
+            <a:pPr indent="0" lvl="0" marL="0" marR="0" rtl="0" algn="ctr">
+              <a:spcBef>
+                <a:spcPts val="0"/>
+              </a:spcBef>
+              <a:spcAft>
+                <a:spcPts val="0"/>
+              </a:spcAft>
+              <a:buNone/>
+            </a:pPr>
+            <a:r>
+              <a:t/>
+            </a:r>
+            <a:endParaRPr b="0" i="0" sz="1800" u="none" cap="none" strike="noStrike">
+              <a:solidFill>
+                <a:schemeClr val="dk1"/>
+              </a:solidFill>
+              <a:latin typeface="Calibri"/>
+              <a:ea typeface="Calibri"/>
+              <a:cs typeface="Calibri"/>
+              <a:sym typeface="Calibri"/>
+            </a:endParaRPr>
+          </a:p>
+        </p:txBody>
+      </p:sp>
+      <p:sp>
+        <p:nvSpPr>
+          <p:cNvPr id="201" name="Google Shape;201;p9"/>
+          <p:cNvSpPr txBox="1"/>
+          <p:nvPr/>
+        </p:nvSpPr>
+        <p:spPr>
+          <a:xfrm>
+            <a:off x="-381000" y="652725"/>
+            <a:ext cx="12954000" cy="461700"/>
+          </a:xfrm>
+          <a:prstGeom prst="rect">
+            <a:avLst/>
+          </a:prstGeom>
+          <a:noFill/>
+          <a:ln>
+            <a:noFill/>
+          </a:ln>
+        </p:spPr>
+        <p:txBody>
+          <a:bodyPr anchorCtr="0" anchor="t" bIns="0" lIns="0" spcFirstLastPara="1" rIns="0" wrap="square" tIns="0">
+            <a:spAutoFit/>
+          </a:bodyPr>
+          <a:lstStyle/>
+          <a:p>
+            <a:pPr indent="0" lvl="0" marL="0" marR="0" rtl="0" algn="ctr">
+              <a:spcBef>
+                <a:spcPts val="0"/>
+              </a:spcBef>
+              <a:spcAft>
+                <a:spcPts val="0"/>
+              </a:spcAft>
+              <a:buNone/>
+            </a:pPr>
+            <a:r>
+              <a:rPr b="1" lang="en-US" sz="3000">
+                <a:solidFill>
+                  <a:srgbClr val="0F172A"/>
+                </a:solidFill>
+                <a:latin typeface="Plus Jakarta Sans"/>
+                <a:ea typeface="Plus Jakarta Sans"/>
+                <a:cs typeface="Plus Jakarta Sans"/>
+                <a:sym typeface="Plus Jakarta Sans"/>
+              </a:rPr>
+              <a:t>Challenges faced &amp; solutions</a:t>
+            </a:r>
+            <a:endParaRPr/>
+          </a:p>
+        </p:txBody>
+      </p:sp>
+      <p:sp>
+        <p:nvSpPr>
+          <p:cNvPr id="202" name="Google Shape;202;p9"/>
+          <p:cNvSpPr txBox="1"/>
+          <p:nvPr/>
+        </p:nvSpPr>
+        <p:spPr>
+          <a:xfrm>
+            <a:off x="1333500" y="1704975"/>
+            <a:ext cx="4553100" cy="277200"/>
+          </a:xfrm>
+          <a:prstGeom prst="rect">
+            <a:avLst/>
+          </a:prstGeom>
+          <a:noFill/>
+          <a:ln>
+            <a:noFill/>
+          </a:ln>
+        </p:spPr>
+        <p:txBody>
+          <a:bodyPr anchorCtr="0" anchor="t" bIns="0" lIns="0" spcFirstLastPara="1" rIns="0" wrap="square" tIns="0">
+            <a:spAutoFit/>
+          </a:bodyPr>
+          <a:lstStyle/>
+          <a:p>
+            <a:pPr indent="0" lvl="0" marL="0" marR="0" rtl="0" algn="l">
+              <a:spcBef>
+                <a:spcPts val="0"/>
+              </a:spcBef>
+              <a:spcAft>
+                <a:spcPts val="0"/>
+              </a:spcAft>
+              <a:buNone/>
+            </a:pPr>
+            <a:r>
+              <a:rPr b="1" i="0" lang="en-US" sz="1800" u="none" cap="none" strike="noStrike">
+                <a:solidFill>
+                  <a:srgbClr val="EF4444"/>
+                </a:solidFill>
+                <a:latin typeface="Plus Jakarta Sans"/>
+                <a:ea typeface="Plus Jakarta Sans"/>
+                <a:cs typeface="Plus Jakarta Sans"/>
+                <a:sym typeface="Plus Jakarta Sans"/>
+              </a:rPr>
+              <a:t>Challenges </a:t>
+            </a:r>
+            <a:endParaRPr/>
+          </a:p>
+        </p:txBody>
+      </p:sp>
+      <p:sp>
+        <p:nvSpPr>
+          <p:cNvPr id="203" name="Google Shape;203;p9"/>
+          <p:cNvSpPr txBox="1"/>
+          <p:nvPr/>
+        </p:nvSpPr>
+        <p:spPr>
+          <a:xfrm>
+            <a:off x="6400800" y="1704975"/>
+            <a:ext cx="4553100" cy="277200"/>
+          </a:xfrm>
+          <a:prstGeom prst="rect">
+            <a:avLst/>
+          </a:prstGeom>
+          <a:noFill/>
+          <a:ln>
+            <a:noFill/>
+          </a:ln>
+        </p:spPr>
+        <p:txBody>
+          <a:bodyPr anchorCtr="0" anchor="t" bIns="0" lIns="0" spcFirstLastPara="1" rIns="0" wrap="square" tIns="0">
+            <a:spAutoFit/>
+          </a:bodyPr>
+          <a:lstStyle/>
+          <a:p>
+            <a:pPr indent="0" lvl="0" marL="0" marR="0" rtl="0" algn="l">
+              <a:spcBef>
+                <a:spcPts val="0"/>
+              </a:spcBef>
+              <a:spcAft>
+                <a:spcPts val="0"/>
+              </a:spcAft>
+              <a:buNone/>
+            </a:pPr>
+            <a:r>
+              <a:rPr b="1" i="0" lang="en-US" sz="1800" u="none" cap="none" strike="noStrike">
+                <a:solidFill>
+                  <a:srgbClr val="6DACBE"/>
+                </a:solidFill>
+                <a:latin typeface="Plus Jakarta Sans"/>
+                <a:ea typeface="Plus Jakarta Sans"/>
+                <a:cs typeface="Plus Jakarta Sans"/>
+                <a:sym typeface="Plus Jakarta Sans"/>
+              </a:rPr>
+              <a:t>Solutions</a:t>
+            </a:r>
+            <a:endParaRPr>
+              <a:solidFill>
+                <a:srgbClr val="6DACBE"/>
+              </a:solidFill>
+            </a:endParaRPr>
+          </a:p>
+        </p:txBody>
+      </p:sp>
+      <p:sp>
+        <p:nvSpPr>
+          <p:cNvPr id="204" name="Google Shape;204;p9"/>
+          <p:cNvSpPr txBox="1"/>
+          <p:nvPr/>
+        </p:nvSpPr>
+        <p:spPr>
+          <a:xfrm>
+            <a:off x="1333500" y="2466975"/>
+            <a:ext cx="5572200" cy="231000"/>
+          </a:xfrm>
+          <a:prstGeom prst="rect">
+            <a:avLst/>
+          </a:prstGeom>
+          <a:noFill/>
+          <a:ln>
+            <a:noFill/>
+          </a:ln>
+        </p:spPr>
+        <p:txBody>
+          <a:bodyPr anchorCtr="0" anchor="t" bIns="0" lIns="0" spcFirstLastPara="1" rIns="0" wrap="square" tIns="0">
+            <a:spAutoFit/>
+          </a:bodyPr>
+          <a:lstStyle/>
+          <a:p>
+            <a:pPr indent="0" lvl="0" marL="0" marR="0" rtl="0" algn="l">
+              <a:spcBef>
+                <a:spcPts val="0"/>
+              </a:spcBef>
+              <a:spcAft>
+                <a:spcPts val="0"/>
+              </a:spcAft>
+              <a:buNone/>
+            </a:pPr>
+            <a:r>
+              <a:rPr b="1" lang="en-US" sz="1500">
+                <a:solidFill>
+                  <a:srgbClr val="0F172A"/>
+                </a:solidFill>
+                <a:latin typeface="Plus Jakarta Sans"/>
+                <a:ea typeface="Plus Jakarta Sans"/>
+                <a:cs typeface="Plus Jakarta Sans"/>
+                <a:sym typeface="Plus Jakarta Sans"/>
+              </a:rPr>
+              <a:t>Github collab work</a:t>
+            </a:r>
+            <a:endParaRPr/>
+          </a:p>
+        </p:txBody>
+      </p:sp>
+      <p:sp>
+        <p:nvSpPr>
+          <p:cNvPr id="205" name="Google Shape;205;p9"/>
+          <p:cNvSpPr txBox="1"/>
+          <p:nvPr/>
+        </p:nvSpPr>
+        <p:spPr>
+          <a:xfrm>
+            <a:off x="1333500" y="2743200"/>
+            <a:ext cx="5572200" cy="207900"/>
+          </a:xfrm>
+          <a:prstGeom prst="rect">
+            <a:avLst/>
+          </a:prstGeom>
+          <a:noFill/>
+          <a:ln>
+            <a:noFill/>
+          </a:ln>
+        </p:spPr>
+        <p:txBody>
+          <a:bodyPr anchorCtr="0" anchor="t" bIns="0" lIns="0" spcFirstLastPara="1" rIns="0" wrap="square" tIns="0">
+            <a:spAutoFit/>
+          </a:bodyPr>
+          <a:lstStyle/>
+          <a:p>
+            <a:pPr indent="0" lvl="0" marL="0" marR="0" rtl="0" algn="l">
+              <a:spcBef>
+                <a:spcPts val="0"/>
+              </a:spcBef>
+              <a:spcAft>
+                <a:spcPts val="0"/>
+              </a:spcAft>
+              <a:buNone/>
+            </a:pPr>
+            <a:r>
+              <a:rPr lang="en-US" sz="1350">
+                <a:solidFill>
+                  <a:srgbClr val="475569"/>
+                </a:solidFill>
+                <a:latin typeface="Plus Jakarta Sans"/>
+                <a:ea typeface="Plus Jakarta Sans"/>
+                <a:cs typeface="Plus Jakarta Sans"/>
+                <a:sym typeface="Plus Jakarta Sans"/>
+              </a:rPr>
+              <a:t>Still a learning process</a:t>
+            </a:r>
+            <a:endParaRPr/>
+          </a:p>
+        </p:txBody>
+      </p:sp>
+      <p:sp>
+        <p:nvSpPr>
+          <p:cNvPr id="206" name="Google Shape;206;p9"/>
+          <p:cNvSpPr txBox="1"/>
+          <p:nvPr/>
+        </p:nvSpPr>
+        <p:spPr>
+          <a:xfrm>
+            <a:off x="1333500" y="3190875"/>
+            <a:ext cx="5572200" cy="231000"/>
+          </a:xfrm>
+          <a:prstGeom prst="rect">
+            <a:avLst/>
+          </a:prstGeom>
+          <a:noFill/>
+          <a:ln>
+            <a:noFill/>
+          </a:ln>
+        </p:spPr>
+        <p:txBody>
+          <a:bodyPr anchorCtr="0" anchor="t" bIns="0" lIns="0" spcFirstLastPara="1" rIns="0" wrap="square" tIns="0">
+            <a:spAutoFit/>
+          </a:bodyPr>
+          <a:lstStyle/>
+          <a:p>
+            <a:pPr indent="0" lvl="0" marL="0" marR="0" rtl="0" algn="l">
+              <a:spcBef>
+                <a:spcPts val="0"/>
+              </a:spcBef>
+              <a:spcAft>
+                <a:spcPts val="0"/>
+              </a:spcAft>
+              <a:buNone/>
+            </a:pPr>
+            <a:r>
+              <a:rPr b="1" lang="en-US" sz="1500">
+                <a:solidFill>
+                  <a:srgbClr val="0F172A"/>
+                </a:solidFill>
+                <a:latin typeface="Plus Jakarta Sans"/>
+                <a:ea typeface="Plus Jakarta Sans"/>
+                <a:cs typeface="Plus Jakarta Sans"/>
+                <a:sym typeface="Plus Jakarta Sans"/>
+              </a:rPr>
+              <a:t>How to share the work</a:t>
+            </a:r>
+            <a:endParaRPr/>
+          </a:p>
+        </p:txBody>
+      </p:sp>
+      <p:sp>
+        <p:nvSpPr>
+          <p:cNvPr id="207" name="Google Shape;207;p9"/>
+          <p:cNvSpPr txBox="1"/>
+          <p:nvPr/>
+        </p:nvSpPr>
+        <p:spPr>
+          <a:xfrm>
+            <a:off x="1333500" y="3467100"/>
+            <a:ext cx="4457700" cy="415500"/>
+          </a:xfrm>
+          <a:prstGeom prst="rect">
+            <a:avLst/>
+          </a:prstGeom>
+          <a:noFill/>
+          <a:ln>
+            <a:noFill/>
+          </a:ln>
+        </p:spPr>
+        <p:txBody>
+          <a:bodyPr anchorCtr="0" anchor="t" bIns="0" lIns="0" spcFirstLastPara="1" rIns="0" wrap="square" tIns="0">
+            <a:spAutoFit/>
+          </a:bodyPr>
+          <a:lstStyle/>
+          <a:p>
+            <a:pPr indent="0" lvl="0" marL="0" marR="0" rtl="0" algn="l">
+              <a:spcBef>
+                <a:spcPts val="0"/>
+              </a:spcBef>
+              <a:spcAft>
+                <a:spcPts val="0"/>
+              </a:spcAft>
+              <a:buNone/>
+            </a:pPr>
+            <a:r>
+              <a:rPr lang="en-US" sz="1350">
+                <a:solidFill>
+                  <a:srgbClr val="475569"/>
+                </a:solidFill>
+                <a:latin typeface="Plus Jakarta Sans"/>
+                <a:ea typeface="Plus Jakarta Sans"/>
+                <a:cs typeface="Plus Jakarta Sans"/>
+                <a:sym typeface="Plus Jakarta Sans"/>
+              </a:rPr>
+              <a:t>Due to the project size, workload division can be challenging</a:t>
+            </a:r>
+            <a:endParaRPr/>
+          </a:p>
+        </p:txBody>
+      </p:sp>
+      <p:sp>
+        <p:nvSpPr>
+          <p:cNvPr id="208" name="Google Shape;208;p9"/>
+          <p:cNvSpPr txBox="1"/>
+          <p:nvPr/>
+        </p:nvSpPr>
+        <p:spPr>
+          <a:xfrm>
+            <a:off x="6400800" y="2466975"/>
+            <a:ext cx="5572200" cy="231000"/>
+          </a:xfrm>
+          <a:prstGeom prst="rect">
+            <a:avLst/>
+          </a:prstGeom>
+          <a:noFill/>
+          <a:ln>
+            <a:noFill/>
+          </a:ln>
+        </p:spPr>
+        <p:txBody>
+          <a:bodyPr anchorCtr="0" anchor="t" bIns="0" lIns="0" spcFirstLastPara="1" rIns="0" wrap="square" tIns="0">
+            <a:spAutoFit/>
+          </a:bodyPr>
+          <a:lstStyle/>
+          <a:p>
+            <a:pPr indent="0" lvl="0" marL="0" marR="0" rtl="0" algn="l">
+              <a:spcBef>
+                <a:spcPts val="0"/>
+              </a:spcBef>
+              <a:spcAft>
+                <a:spcPts val="0"/>
+              </a:spcAft>
+              <a:buNone/>
+            </a:pPr>
+            <a:r>
+              <a:rPr b="1" lang="en-US" sz="1500">
+                <a:solidFill>
+                  <a:srgbClr val="0F172A"/>
+                </a:solidFill>
+                <a:latin typeface="Plus Jakarta Sans"/>
+                <a:ea typeface="Plus Jakarta Sans"/>
+                <a:cs typeface="Plus Jakarta Sans"/>
+                <a:sym typeface="Plus Jakarta Sans"/>
+              </a:rPr>
+              <a:t>GenAI support</a:t>
+            </a:r>
+            <a:endParaRPr/>
+          </a:p>
+        </p:txBody>
+      </p:sp>
+      <p:sp>
+        <p:nvSpPr>
+          <p:cNvPr id="209" name="Google Shape;209;p9"/>
+          <p:cNvSpPr txBox="1"/>
+          <p:nvPr/>
+        </p:nvSpPr>
+        <p:spPr>
+          <a:xfrm>
+            <a:off x="6400800" y="2743200"/>
+            <a:ext cx="5572200" cy="207900"/>
+          </a:xfrm>
+          <a:prstGeom prst="rect">
+            <a:avLst/>
+          </a:prstGeom>
+          <a:noFill/>
+          <a:ln>
+            <a:noFill/>
+          </a:ln>
+        </p:spPr>
+        <p:txBody>
+          <a:bodyPr anchorCtr="0" anchor="t" bIns="0" lIns="0" spcFirstLastPara="1" rIns="0" wrap="square" tIns="0">
+            <a:spAutoFit/>
+          </a:bodyPr>
+          <a:lstStyle/>
+          <a:p>
+            <a:pPr indent="0" lvl="0" marL="0" marR="0" rtl="0" algn="l">
+              <a:spcBef>
+                <a:spcPts val="0"/>
+              </a:spcBef>
+              <a:spcAft>
+                <a:spcPts val="0"/>
+              </a:spcAft>
+              <a:buNone/>
+            </a:pPr>
+            <a:r>
+              <a:rPr lang="en-US" sz="1350">
+                <a:solidFill>
+                  <a:srgbClr val="475569"/>
+                </a:solidFill>
+                <a:latin typeface="Plus Jakarta Sans"/>
+                <a:ea typeface="Plus Jakarta Sans"/>
+                <a:cs typeface="Plus Jakarta Sans"/>
+                <a:sym typeface="Plus Jakarta Sans"/>
+              </a:rPr>
+              <a:t>Usage of GenAI tools to help with Github understanding</a:t>
+            </a:r>
+            <a:endParaRPr/>
+          </a:p>
+        </p:txBody>
+      </p:sp>
+      <p:sp>
+        <p:nvSpPr>
+          <p:cNvPr id="210" name="Google Shape;210;p9"/>
+          <p:cNvSpPr txBox="1"/>
+          <p:nvPr/>
+        </p:nvSpPr>
+        <p:spPr>
+          <a:xfrm>
+            <a:off x="6400800" y="3190875"/>
+            <a:ext cx="5572200" cy="231000"/>
+          </a:xfrm>
+          <a:prstGeom prst="rect">
+            <a:avLst/>
+          </a:prstGeom>
+          <a:noFill/>
+          <a:ln>
+            <a:noFill/>
+          </a:ln>
+        </p:spPr>
+        <p:txBody>
+          <a:bodyPr anchorCtr="0" anchor="t" bIns="0" lIns="0" spcFirstLastPara="1" rIns="0" wrap="square" tIns="0">
+            <a:spAutoFit/>
+          </a:bodyPr>
+          <a:lstStyle/>
+          <a:p>
+            <a:pPr indent="0" lvl="0" marL="0" marR="0" rtl="0" algn="l">
+              <a:spcBef>
+                <a:spcPts val="0"/>
+              </a:spcBef>
+              <a:spcAft>
+                <a:spcPts val="0"/>
+              </a:spcAft>
+              <a:buNone/>
+            </a:pPr>
+            <a:r>
+              <a:rPr b="1" lang="en-US" sz="1500">
+                <a:solidFill>
+                  <a:srgbClr val="0F172A"/>
+                </a:solidFill>
+                <a:latin typeface="Plus Jakarta Sans"/>
+                <a:ea typeface="Plus Jakarta Sans"/>
+                <a:cs typeface="Plus Jakarta Sans"/>
+                <a:sym typeface="Plus Jakarta Sans"/>
+              </a:rPr>
+              <a:t>Prioritization + dynamic work</a:t>
+            </a:r>
+            <a:endParaRPr/>
+          </a:p>
+        </p:txBody>
+      </p:sp>
+      <p:sp>
+        <p:nvSpPr>
+          <p:cNvPr id="211" name="Google Shape;211;p9"/>
+          <p:cNvSpPr txBox="1"/>
+          <p:nvPr/>
+        </p:nvSpPr>
+        <p:spPr>
+          <a:xfrm>
+            <a:off x="6400800" y="3467100"/>
+            <a:ext cx="4697400" cy="415500"/>
+          </a:xfrm>
+          <a:prstGeom prst="rect">
+            <a:avLst/>
+          </a:prstGeom>
+          <a:noFill/>
+          <a:ln>
+            <a:noFill/>
+          </a:ln>
+        </p:spPr>
+        <p:txBody>
+          <a:bodyPr anchorCtr="0" anchor="t" bIns="0" lIns="0" spcFirstLastPara="1" rIns="0" wrap="square" tIns="0">
+            <a:spAutoFit/>
+          </a:bodyPr>
+          <a:lstStyle/>
+          <a:p>
+            <a:pPr indent="0" lvl="0" marL="0" marR="0" rtl="0" algn="l">
+              <a:spcBef>
+                <a:spcPts val="0"/>
+              </a:spcBef>
+              <a:spcAft>
+                <a:spcPts val="0"/>
+              </a:spcAft>
+              <a:buNone/>
+            </a:pPr>
+            <a:r>
+              <a:rPr lang="en-US" sz="1350">
+                <a:solidFill>
+                  <a:srgbClr val="475569"/>
+                </a:solidFill>
+                <a:latin typeface="Plus Jakarta Sans"/>
+                <a:ea typeface="Plus Jakarta Sans"/>
+                <a:cs typeface="Plus Jakarta Sans"/>
+                <a:sym typeface="Plus Jakarta Sans"/>
+              </a:rPr>
+              <a:t>Knowledge</a:t>
+            </a:r>
+            <a:r>
+              <a:rPr lang="en-US" sz="1350">
+                <a:solidFill>
+                  <a:srgbClr val="475569"/>
+                </a:solidFill>
+                <a:latin typeface="Plus Jakarta Sans"/>
+                <a:ea typeface="Plus Jakarta Sans"/>
+                <a:cs typeface="Plus Jakarta Sans"/>
+                <a:sym typeface="Plus Jakarta Sans"/>
+              </a:rPr>
+              <a:t> base tasks shared likewise as a starting  base, followed by dynamic collaboration</a:t>
+            </a:r>
+            <a:endParaRPr/>
+          </a:p>
+        </p:txBody>
+      </p:sp>
+      <p:sp>
+        <p:nvSpPr>
+          <p:cNvPr id="212" name="Google Shape;212;p9"/>
+          <p:cNvSpPr txBox="1"/>
+          <p:nvPr/>
+        </p:nvSpPr>
+        <p:spPr>
+          <a:xfrm>
+            <a:off x="1333500" y="4122088"/>
+            <a:ext cx="5572200" cy="231000"/>
+          </a:xfrm>
+          <a:prstGeom prst="rect">
+            <a:avLst/>
+          </a:prstGeom>
+          <a:noFill/>
+          <a:ln>
+            <a:noFill/>
+          </a:ln>
+        </p:spPr>
+        <p:txBody>
+          <a:bodyPr anchorCtr="0" anchor="t" bIns="0" lIns="0" spcFirstLastPara="1" rIns="0" wrap="square" tIns="0">
+            <a:spAutoFit/>
+          </a:bodyPr>
+          <a:lstStyle/>
+          <a:p>
+            <a:pPr indent="0" lvl="0" marL="0" marR="0" rtl="0" algn="l">
+              <a:spcBef>
+                <a:spcPts val="0"/>
+              </a:spcBef>
+              <a:spcAft>
+                <a:spcPts val="0"/>
+              </a:spcAft>
+              <a:buNone/>
+            </a:pPr>
+            <a:r>
+              <a:rPr b="1" lang="en-US" sz="1500">
+                <a:solidFill>
+                  <a:srgbClr val="0F172A"/>
+                </a:solidFill>
+                <a:latin typeface="Plus Jakarta Sans"/>
+                <a:ea typeface="Plus Jakarta Sans"/>
+                <a:cs typeface="Plus Jakarta Sans"/>
+                <a:sym typeface="Plus Jakarta Sans"/>
+              </a:rPr>
+              <a:t>Set up and start</a:t>
+            </a:r>
+            <a:endParaRPr/>
+          </a:p>
+        </p:txBody>
+      </p:sp>
+      <p:sp>
+        <p:nvSpPr>
+          <p:cNvPr id="213" name="Google Shape;213;p9"/>
+          <p:cNvSpPr txBox="1"/>
+          <p:nvPr/>
+        </p:nvSpPr>
+        <p:spPr>
+          <a:xfrm>
+            <a:off x="1333500" y="4398313"/>
+            <a:ext cx="4457700" cy="207900"/>
+          </a:xfrm>
+          <a:prstGeom prst="rect">
+            <a:avLst/>
+          </a:prstGeom>
+          <a:noFill/>
+          <a:ln>
+            <a:noFill/>
+          </a:ln>
+        </p:spPr>
+        <p:txBody>
+          <a:bodyPr anchorCtr="0" anchor="t" bIns="0" lIns="0" spcFirstLastPara="1" rIns="0" wrap="square" tIns="0">
+            <a:spAutoFit/>
+          </a:bodyPr>
+          <a:lstStyle/>
+          <a:p>
+            <a:pPr indent="0" lvl="0" marL="0" marR="0" rtl="0" algn="l">
+              <a:spcBef>
+                <a:spcPts val="0"/>
+              </a:spcBef>
+              <a:spcAft>
+                <a:spcPts val="0"/>
+              </a:spcAft>
+              <a:buNone/>
+            </a:pPr>
+            <a:r>
+              <a:rPr lang="en-US" sz="1350">
+                <a:solidFill>
+                  <a:srgbClr val="475569"/>
+                </a:solidFill>
+                <a:latin typeface="Plus Jakarta Sans"/>
+                <a:ea typeface="Plus Jakarta Sans"/>
+                <a:cs typeface="Plus Jakarta Sans"/>
+                <a:sym typeface="Plus Jakarta Sans"/>
+              </a:rPr>
+              <a:t>Part</a:t>
+            </a:r>
+            <a:r>
+              <a:rPr lang="en-US" sz="1350">
+                <a:solidFill>
+                  <a:srgbClr val="475569"/>
+                </a:solidFill>
+                <a:latin typeface="Plus Jakarta Sans"/>
+                <a:ea typeface="Plus Jakarta Sans"/>
+                <a:cs typeface="Plus Jakarta Sans"/>
+                <a:sym typeface="Plus Jakarta Sans"/>
+              </a:rPr>
+              <a:t> of the process that took the longer</a:t>
+            </a:r>
+            <a:endParaRPr/>
+          </a:p>
+        </p:txBody>
+      </p:sp>
+      <p:sp>
+        <p:nvSpPr>
+          <p:cNvPr id="214" name="Google Shape;214;p9"/>
+          <p:cNvSpPr txBox="1"/>
+          <p:nvPr/>
+        </p:nvSpPr>
+        <p:spPr>
+          <a:xfrm>
+            <a:off x="6400763" y="4122100"/>
+            <a:ext cx="5572200" cy="231000"/>
+          </a:xfrm>
+          <a:prstGeom prst="rect">
+            <a:avLst/>
+          </a:prstGeom>
+          <a:noFill/>
+          <a:ln>
+            <a:noFill/>
+          </a:ln>
+        </p:spPr>
+        <p:txBody>
+          <a:bodyPr anchorCtr="0" anchor="t" bIns="0" lIns="0" spcFirstLastPara="1" rIns="0" wrap="square" tIns="0">
+            <a:spAutoFit/>
+          </a:bodyPr>
+          <a:lstStyle/>
+          <a:p>
+            <a:pPr indent="0" lvl="0" marL="0" marR="0" rtl="0" algn="l">
+              <a:spcBef>
+                <a:spcPts val="0"/>
+              </a:spcBef>
+              <a:spcAft>
+                <a:spcPts val="0"/>
+              </a:spcAft>
+              <a:buNone/>
+            </a:pPr>
+            <a:r>
+              <a:rPr b="1" lang="en-US" sz="1500">
+                <a:solidFill>
+                  <a:srgbClr val="0F172A"/>
+                </a:solidFill>
+                <a:latin typeface="Plus Jakarta Sans"/>
+                <a:ea typeface="Plus Jakarta Sans"/>
+                <a:cs typeface="Plus Jakarta Sans"/>
+                <a:sym typeface="Plus Jakarta Sans"/>
+              </a:rPr>
+              <a:t>Ironhack support </a:t>
+            </a:r>
+            <a:endParaRPr/>
+          </a:p>
+        </p:txBody>
+      </p:sp>
+      <p:sp>
+        <p:nvSpPr>
+          <p:cNvPr id="215" name="Google Shape;215;p9"/>
+          <p:cNvSpPr txBox="1"/>
+          <p:nvPr/>
+        </p:nvSpPr>
+        <p:spPr>
+          <a:xfrm>
+            <a:off x="6400763" y="4398325"/>
+            <a:ext cx="5572200" cy="207900"/>
+          </a:xfrm>
+          <a:prstGeom prst="rect">
+            <a:avLst/>
+          </a:prstGeom>
+          <a:noFill/>
+          <a:ln>
+            <a:noFill/>
+          </a:ln>
+        </p:spPr>
+        <p:txBody>
+          <a:bodyPr anchorCtr="0" anchor="t" bIns="0" lIns="0" spcFirstLastPara="1" rIns="0" wrap="square" tIns="0">
+            <a:spAutoFit/>
+          </a:bodyPr>
+          <a:lstStyle/>
+          <a:p>
+            <a:pPr indent="0" lvl="0" marL="0" marR="0" rtl="0" algn="l">
+              <a:spcBef>
+                <a:spcPts val="0"/>
+              </a:spcBef>
+              <a:spcAft>
+                <a:spcPts val="0"/>
+              </a:spcAft>
+              <a:buNone/>
+            </a:pPr>
+            <a:r>
+              <a:rPr lang="en-US" sz="1350">
+                <a:solidFill>
+                  <a:srgbClr val="475569"/>
+                </a:solidFill>
+                <a:latin typeface="Plus Jakarta Sans"/>
+                <a:ea typeface="Plus Jakarta Sans"/>
+                <a:cs typeface="Plus Jakarta Sans"/>
+                <a:sym typeface="Plus Jakarta Sans"/>
+              </a:rPr>
+              <a:t>Followed the bootcamp  step-by-step material</a:t>
+            </a:r>
+            <a:endParaRPr/>
+          </a:p>
+        </p:txBody>
+      </p:sp>
+    </p:spTree>
+  </p:cSld>
+  <p:clrMapOvr>
+    <a:masterClrMapping/>
+  </p:clrMapOvr>
+</p:sld>
+</file>
+
+<file path=ppt/slides/slide11.xml><?xml version="1.0" encoding="utf-8"?>
+<p:sld xmlns:a="http://schemas.openxmlformats.org/drawingml/2006/main" xmlns:r="http://schemas.openxmlformats.org/officeDocument/2006/relationships" xmlns:mc="http://schemas.openxmlformats.org/markup-compatibility/2006" xmlns:mv="urn:schemas-microsoft-com:mac:vml" xmlns:p="http://schemas.openxmlformats.org/presentationml/2006/main" xmlns:c="http://schemas.openxmlformats.org/drawingml/2006/chart" xmlns:dgm="http://schemas.openxmlformats.org/drawingml/2006/diagram" xmlns:o="urn:schemas-microsoft-com:office:office" xmlns:v="urn:schemas-microsoft-com:vml" xmlns:pvml="urn:schemas-microsoft-com:office:powerpoint" xmlns:com="http://schemas.openxmlformats.org/drawingml/2006/compatibility" xmlns:p14="http://schemas.microsoft.com/office/powerpoint/2010/main" xmlns:p15="http://schemas.microsoft.com/office/powerpoint/2012/main" xmlns:ahyp="http://schemas.microsoft.com/office/drawing/2018/hyperlinkcolor">
+  <p:cSld>
+    <p:bg>
+      <p:bgPr>
+        <a:solidFill>
+          <a:srgbClr val="FFFFFF"/>
+        </a:solidFill>
+      </p:bgPr>
+    </p:bg>
+    <p:spTree>
+      <p:nvGrpSpPr>
+        <p:cNvPr id="219" name="Shape 219"/>
+        <p:cNvGrpSpPr/>
+        <p:nvPr/>
+      </p:nvGrpSpPr>
+      <p:grpSpPr>
+        <a:xfrm>
+          <a:off x="0" y="0"/>
+          <a:ext cx="0" cy="0"/>
+          <a:chOff x="0" y="0"/>
+          <a:chExt cx="0" cy="0"/>
+        </a:xfrm>
+      </p:grpSpPr>
+      <p:sp>
+        <p:nvSpPr>
+          <p:cNvPr id="220" name="Google Shape;220;p10"/>
           <p:cNvSpPr/>
           <p:nvPr/>
         </p:nvSpPr>
@@ -11661,7 +12673,7 @@
       </p:sp>
       <p:sp>
         <p:nvSpPr>
-          <p:cNvPr id="198" name="Google Shape;198;p10"/>
+          <p:cNvPr id="221" name="Google Shape;221;p10"/>
           <p:cNvSpPr/>
           <p:nvPr/>
         </p:nvSpPr>
@@ -11710,7 +12722,7 @@
       </p:sp>
       <p:sp>
         <p:nvSpPr>
-          <p:cNvPr id="199" name="Google Shape;199;p10"/>
+          <p:cNvPr id="222" name="Google Shape;222;p10"/>
           <p:cNvSpPr/>
           <p:nvPr/>
         </p:nvSpPr>
@@ -11761,7 +12773,7 @@
       </p:sp>
       <p:sp>
         <p:nvSpPr>
-          <p:cNvPr id="200" name="Google Shape;200;p10"/>
+          <p:cNvPr id="223" name="Google Shape;223;p10"/>
           <p:cNvSpPr/>
           <p:nvPr/>
         </p:nvSpPr>
@@ -11812,7 +12824,7 @@
       </p:sp>
       <p:sp>
         <p:nvSpPr>
-          <p:cNvPr id="201" name="Google Shape;201;p10"/>
+          <p:cNvPr id="224" name="Google Shape;224;p10"/>
           <p:cNvSpPr txBox="1"/>
           <p:nvPr/>
         </p:nvSpPr>
@@ -11889,7 +12901,7 @@
       </p:sp>
       <p:sp>
         <p:nvSpPr>
-          <p:cNvPr id="202" name="Google Shape;202;p10"/>
+          <p:cNvPr id="225" name="Google Shape;225;p10"/>
           <p:cNvSpPr txBox="1"/>
           <p:nvPr/>
         </p:nvSpPr>
@@ -11951,7 +12963,7 @@
       </p:sp>
       <p:sp>
         <p:nvSpPr>
-          <p:cNvPr id="203" name="Google Shape;203;p10"/>
+          <p:cNvPr id="226" name="Google Shape;226;p10"/>
           <p:cNvSpPr txBox="1"/>
           <p:nvPr/>
         </p:nvSpPr>
@@ -12001,7 +13013,7 @@
       </p:sp>
       <p:sp>
         <p:nvSpPr>
-          <p:cNvPr id="204" name="Google Shape;204;p10"/>
+          <p:cNvPr id="227" name="Google Shape;227;p10"/>
           <p:cNvSpPr txBox="1"/>
           <p:nvPr/>
         </p:nvSpPr>
@@ -12076,7 +13088,7 @@
       </p:sp>
       <p:sp>
         <p:nvSpPr>
-          <p:cNvPr id="205" name="Google Shape;205;p10"/>
+          <p:cNvPr id="228" name="Google Shape;228;p10"/>
           <p:cNvSpPr txBox="1"/>
           <p:nvPr/>
         </p:nvSpPr>
@@ -12126,7 +13138,7 @@
       </p:sp>
       <p:pic>
         <p:nvPicPr>
-          <p:cNvPr id="206" name="Google Shape;206;p10"/>
+          <p:cNvPr id="229" name="Google Shape;229;p10"/>
           <p:cNvPicPr preferRelativeResize="0"/>
           <p:nvPr/>
         </p:nvPicPr>
@@ -12154,7 +13166,7 @@
       </p:pic>
       <p:pic>
         <p:nvPicPr>
-          <p:cNvPr id="207" name="Google Shape;207;p10"/>
+          <p:cNvPr id="230" name="Google Shape;230;p10"/>
           <p:cNvPicPr preferRelativeResize="0"/>
           <p:nvPr/>
         </p:nvPicPr>
@@ -12182,7 +13194,7 @@
       </p:pic>
       <p:pic>
         <p:nvPicPr>
-          <p:cNvPr id="208" name="Google Shape;208;p10"/>
+          <p:cNvPr id="231" name="Google Shape;231;p10"/>
           <p:cNvPicPr preferRelativeResize="0"/>
           <p:nvPr/>
         </p:nvPicPr>
@@ -12209,7 +13221,7 @@
       </p:pic>
       <p:sp>
         <p:nvSpPr>
-          <p:cNvPr id="209" name="Google Shape;209;p10"/>
+          <p:cNvPr id="232" name="Google Shape;232;p10"/>
           <p:cNvSpPr/>
           <p:nvPr/>
         </p:nvSpPr>
@@ -12267,7 +13279,7 @@
       </p:sp>
       <p:sp>
         <p:nvSpPr>
-          <p:cNvPr id="210" name="Google Shape;210;p10"/>
+          <p:cNvPr id="233" name="Google Shape;233;p10"/>
           <p:cNvSpPr txBox="1"/>
           <p:nvPr/>
         </p:nvSpPr>
@@ -12317,7 +13329,7 @@
       </p:sp>
       <p:sp>
         <p:nvSpPr>
-          <p:cNvPr id="211" name="Google Shape;211;p10"/>
+          <p:cNvPr id="234" name="Google Shape;234;p10"/>
           <p:cNvSpPr txBox="1"/>
           <p:nvPr/>
         </p:nvSpPr>
@@ -12367,7 +13379,7 @@
       </p:sp>
       <p:sp>
         <p:nvSpPr>
-          <p:cNvPr id="212" name="Google Shape;212;p10"/>
+          <p:cNvPr id="235" name="Google Shape;235;p10"/>
           <p:cNvSpPr txBox="1"/>
           <p:nvPr/>
         </p:nvSpPr>
@@ -12423,7 +13435,7 @@
 </p:sld>
 </file>
 
-<file path=ppt/slides/slide11.xml><?xml version="1.0" encoding="utf-8"?>
+<file path=ppt/slides/slide12.xml><?xml version="1.0" encoding="utf-8"?>
 <p:sld xmlns:a="http://schemas.openxmlformats.org/drawingml/2006/main" xmlns:r="http://schemas.openxmlformats.org/officeDocument/2006/relationships" xmlns:mc="http://schemas.openxmlformats.org/markup-compatibility/2006" xmlns:mv="urn:schemas-microsoft-com:mac:vml" xmlns:p="http://schemas.openxmlformats.org/presentationml/2006/main" xmlns:c="http://schemas.openxmlformats.org/drawingml/2006/chart" xmlns:dgm="http://schemas.openxmlformats.org/drawingml/2006/diagram" xmlns:o="urn:schemas-microsoft-com:office:office" xmlns:v="urn:schemas-microsoft-com:vml" xmlns:pvml="urn:schemas-microsoft-com:office:powerpoint" xmlns:com="http://schemas.openxmlformats.org/drawingml/2006/compatibility" xmlns:p14="http://schemas.microsoft.com/office/powerpoint/2010/main" xmlns:p15="http://schemas.microsoft.com/office/powerpoint/2012/main" xmlns:ahyp="http://schemas.microsoft.com/office/drawing/2018/hyperlinkcolor">
   <p:cSld>
     <p:bg>
@@ -12435,7 +13447,7 @@
     </p:bg>
     <p:spTree>
       <p:nvGrpSpPr>
-        <p:cNvPr id="216" name="Shape 216"/>
+        <p:cNvPr id="239" name="Shape 239"/>
         <p:cNvGrpSpPr/>
         <p:nvPr/>
       </p:nvGrpSpPr>
@@ -12449,13 +13461,13 @@
       </p:grpSpPr>
       <p:sp>
         <p:nvSpPr>
-          <p:cNvPr id="217" name="Google Shape;217;p11"/>
+          <p:cNvPr id="240" name="Google Shape;240;p11"/>
           <p:cNvSpPr txBox="1"/>
           <p:nvPr/>
         </p:nvSpPr>
         <p:spPr>
           <a:xfrm>
-            <a:off x="2545556" y="3199930"/>
+            <a:off x="2545556" y="3418192"/>
             <a:ext cx="7101000" cy="738900"/>
           </a:xfrm>
           <a:prstGeom prst="rect">
@@ -12502,13 +13514,13 @@
       </p:sp>
       <p:sp>
         <p:nvSpPr>
-          <p:cNvPr id="218" name="Google Shape;218;p11"/>
+          <p:cNvPr id="241" name="Google Shape;241;p11"/>
           <p:cNvSpPr txBox="1"/>
           <p:nvPr/>
         </p:nvSpPr>
         <p:spPr>
           <a:xfrm>
-            <a:off x="5316140" y="4099000"/>
+            <a:off x="5316140" y="4317262"/>
             <a:ext cx="1559700" cy="277200"/>
           </a:xfrm>
           <a:prstGeom prst="rect">
@@ -12564,13 +13576,13 @@
       </p:sp>
       <p:grpSp>
         <p:nvGrpSpPr>
-          <p:cNvPr id="219" name="Google Shape;219;p11"/>
+          <p:cNvPr id="242" name="Google Shape;242;p11"/>
           <p:cNvGrpSpPr/>
           <p:nvPr/>
         </p:nvGrpSpPr>
         <p:grpSpPr>
           <a:xfrm>
-            <a:off x="5249727" y="1312397"/>
+            <a:off x="5249727" y="1530659"/>
             <a:ext cx="1692647" cy="1653040"/>
             <a:chOff x="8066800" y="2487900"/>
             <a:chExt cx="3012900" cy="2942400"/>
@@ -12578,7 +13590,7 @@
         </p:grpSpPr>
         <p:sp>
           <p:nvSpPr>
-            <p:cNvPr id="220" name="Google Shape;220;p11"/>
+            <p:cNvPr id="243" name="Google Shape;243;p11"/>
             <p:cNvSpPr/>
             <p:nvPr/>
           </p:nvSpPr>
@@ -12635,7 +13647,7 @@
         </p:sp>
         <p:pic>
           <p:nvPicPr>
-            <p:cNvPr id="221" name="Google Shape;221;p11"/>
+            <p:cNvPr id="244" name="Google Shape;244;p11"/>
             <p:cNvPicPr preferRelativeResize="0"/>
             <p:nvPr/>
           </p:nvPicPr>
@@ -12729,7 +13741,7 @@
         </p:nvSpPr>
         <p:spPr>
           <a:xfrm>
-            <a:off x="5029225" y="398597"/>
+            <a:off x="5029225" y="468935"/>
             <a:ext cx="6096000" cy="554100"/>
           </a:xfrm>
           <a:prstGeom prst="rect">
@@ -12768,7 +13780,7 @@
                 <a:cs typeface="Plus Jakarta Sans"/>
                 <a:sym typeface="Plus Jakarta Sans"/>
               </a:rPr>
-              <a:t>Overview and Motivation </a:t>
+              <a:t>Project Motivation </a:t>
             </a:r>
             <a:endParaRPr/>
           </a:p>
@@ -13251,6 +14263,160 @@
           </a:p>
         </p:txBody>
       </p:sp>
+      <p:grpSp>
+        <p:nvGrpSpPr>
+          <p:cNvPr id="102" name="Google Shape;102;p2"/>
+          <p:cNvGrpSpPr/>
+          <p:nvPr/>
+        </p:nvGrpSpPr>
+        <p:grpSpPr>
+          <a:xfrm>
+            <a:off x="3116127" y="398609"/>
+            <a:ext cx="1692647" cy="1653040"/>
+            <a:chOff x="8066800" y="2487900"/>
+            <a:chExt cx="3012900" cy="2942400"/>
+          </a:xfrm>
+        </p:grpSpPr>
+        <p:sp>
+          <p:nvSpPr>
+            <p:cNvPr id="103" name="Google Shape;103;p2"/>
+            <p:cNvSpPr/>
+            <p:nvPr/>
+          </p:nvSpPr>
+          <p:spPr>
+            <a:xfrm>
+              <a:off x="8066800" y="2487900"/>
+              <a:ext cx="3012900" cy="2942400"/>
+            </a:xfrm>
+            <a:prstGeom prst="ellipse">
+              <a:avLst/>
+            </a:prstGeom>
+            <a:solidFill>
+              <a:schemeClr val="lt1"/>
+            </a:solidFill>
+            <a:ln cap="flat" cmpd="sng" w="5350">
+              <a:solidFill>
+                <a:srgbClr val="6DACBE"/>
+              </a:solidFill>
+              <a:prstDash val="solid"/>
+              <a:round/>
+              <a:headEnd len="sm" w="sm" type="none"/>
+              <a:tailEnd len="sm" w="sm" type="none"/>
+            </a:ln>
+          </p:spPr>
+          <p:txBody>
+            <a:bodyPr anchorCtr="0" anchor="ctr" bIns="51375" lIns="51375" spcFirstLastPara="1" rIns="51375" wrap="square" tIns="51375">
+              <a:noAutofit/>
+            </a:bodyPr>
+            <a:lstStyle/>
+            <a:p>
+              <a:pPr indent="0" lvl="0" marL="0" rtl="0" algn="ctr">
+                <a:spcBef>
+                  <a:spcPts val="0"/>
+                </a:spcBef>
+                <a:spcAft>
+                  <a:spcPts val="0"/>
+                </a:spcAft>
+                <a:buNone/>
+              </a:pPr>
+              <a:r>
+                <a:t/>
+              </a:r>
+              <a:endParaRPr sz="786">
+                <a:highlight>
+                  <a:schemeClr val="lt1"/>
+                </a:highlight>
+                <a:latin typeface="Calibri"/>
+                <a:ea typeface="Calibri"/>
+                <a:cs typeface="Calibri"/>
+                <a:sym typeface="Calibri"/>
+              </a:endParaRPr>
+            </a:p>
+          </p:txBody>
+        </p:sp>
+        <p:pic>
+          <p:nvPicPr>
+            <p:cNvPr id="104" name="Google Shape;104;p2"/>
+            <p:cNvPicPr preferRelativeResize="0"/>
+            <p:nvPr/>
+          </p:nvPicPr>
+          <p:blipFill>
+            <a:blip r:embed="rId4">
+              <a:alphaModFix/>
+            </a:blip>
+            <a:stretch>
+              <a:fillRect/>
+            </a:stretch>
+          </p:blipFill>
+          <p:spPr>
+            <a:xfrm>
+              <a:off x="8268325" y="3501567"/>
+              <a:ext cx="2609850" cy="885825"/>
+            </a:xfrm>
+            <a:prstGeom prst="rect">
+              <a:avLst/>
+            </a:prstGeom>
+            <a:noFill/>
+            <a:ln>
+              <a:noFill/>
+            </a:ln>
+          </p:spPr>
+        </p:pic>
+      </p:grpSp>
+      <p:sp>
+        <p:nvSpPr>
+          <p:cNvPr id="105" name="Google Shape;105;p2"/>
+          <p:cNvSpPr txBox="1"/>
+          <p:nvPr/>
+        </p:nvSpPr>
+        <p:spPr>
+          <a:xfrm>
+            <a:off x="5063227" y="232663"/>
+            <a:ext cx="4491600" cy="184800"/>
+          </a:xfrm>
+          <a:prstGeom prst="rect">
+            <a:avLst/>
+          </a:prstGeom>
+          <a:noFill/>
+          <a:ln>
+            <a:noFill/>
+          </a:ln>
+        </p:spPr>
+        <p:txBody>
+          <a:bodyPr anchorCtr="0" anchor="t" bIns="0" lIns="0" spcFirstLastPara="1" rIns="0" wrap="square" tIns="0">
+            <a:spAutoFit/>
+          </a:bodyPr>
+          <a:lstStyle/>
+          <a:p>
+            <a:pPr indent="0" lvl="0" marL="0" marR="0" rtl="0" algn="l">
+              <a:spcBef>
+                <a:spcPts val="0"/>
+              </a:spcBef>
+              <a:spcAft>
+                <a:spcPts val="0"/>
+              </a:spcAft>
+              <a:buNone/>
+            </a:pPr>
+            <a:r>
+              <a:rPr b="1" lang="en-US" sz="1200">
+                <a:solidFill>
+                  <a:srgbClr val="6DACBE"/>
+                </a:solidFill>
+                <a:latin typeface="Plus Jakarta Sans"/>
+                <a:ea typeface="Plus Jakarta Sans"/>
+                <a:cs typeface="Plus Jakarta Sans"/>
+                <a:sym typeface="Plus Jakarta Sans"/>
+              </a:rPr>
+              <a:t>OVERVIEW</a:t>
+            </a:r>
+            <a:endParaRPr>
+              <a:solidFill>
+                <a:srgbClr val="6DACBE"/>
+              </a:solidFill>
+            </a:endParaRPr>
+          </a:p>
+        </p:txBody>
+      </p:sp>
     </p:spTree>
   </p:cSld>
   <p:clrMapOvr>
@@ -13271,7 +14437,7 @@
     </p:bg>
     <p:spTree>
       <p:nvGrpSpPr>
-        <p:cNvPr id="105" name="Shape 105"/>
+        <p:cNvPr id="109" name="Shape 109"/>
         <p:cNvGrpSpPr/>
         <p:nvPr/>
       </p:nvGrpSpPr>
@@ -13285,7 +14451,7 @@
       </p:grpSpPr>
       <p:sp>
         <p:nvSpPr>
-          <p:cNvPr id="106" name="Google Shape;106;p3"/>
+          <p:cNvPr id="110" name="Google Shape;110;p3"/>
           <p:cNvSpPr txBox="1"/>
           <p:nvPr/>
         </p:nvSpPr>
@@ -13339,7 +14505,7 @@
       </p:sp>
       <p:sp>
         <p:nvSpPr>
-          <p:cNvPr id="107" name="Google Shape;107;p3"/>
+          <p:cNvPr id="111" name="Google Shape;111;p3"/>
           <p:cNvSpPr txBox="1"/>
           <p:nvPr/>
         </p:nvSpPr>
@@ -13389,7 +14555,7 @@
       </p:sp>
       <p:sp>
         <p:nvSpPr>
-          <p:cNvPr id="108" name="Google Shape;108;p3"/>
+          <p:cNvPr id="112" name="Google Shape;112;p3"/>
           <p:cNvSpPr/>
           <p:nvPr/>
         </p:nvSpPr>
@@ -13442,7 +14608,7 @@
       </p:sp>
       <p:pic>
         <p:nvPicPr>
-          <p:cNvPr descr="image.png" id="109" name="Google Shape;109;p3"/>
+          <p:cNvPr descr="image.png" id="113" name="Google Shape;113;p3"/>
           <p:cNvPicPr preferRelativeResize="0"/>
           <p:nvPr/>
         </p:nvPicPr>
@@ -13469,7 +14635,7 @@
       </p:pic>
       <p:sp>
         <p:nvSpPr>
-          <p:cNvPr id="110" name="Google Shape;110;p3"/>
+          <p:cNvPr id="114" name="Google Shape;114;p3"/>
           <p:cNvSpPr txBox="1"/>
           <p:nvPr/>
         </p:nvSpPr>
@@ -13543,7 +14709,7 @@
       </p:sp>
       <p:sp>
         <p:nvSpPr>
-          <p:cNvPr id="111" name="Google Shape;111;p3"/>
+          <p:cNvPr id="115" name="Google Shape;115;p3"/>
           <p:cNvSpPr txBox="1"/>
           <p:nvPr/>
         </p:nvSpPr>
@@ -13716,7 +14882,7 @@
       </p:sp>
       <p:sp>
         <p:nvSpPr>
-          <p:cNvPr id="112" name="Google Shape;112;p3"/>
+          <p:cNvPr id="116" name="Google Shape;116;p3"/>
           <p:cNvSpPr txBox="1"/>
           <p:nvPr/>
         </p:nvSpPr>
@@ -13789,7 +14955,7 @@
       </p:sp>
       <p:sp>
         <p:nvSpPr>
-          <p:cNvPr id="113" name="Google Shape;113;p3"/>
+          <p:cNvPr id="117" name="Google Shape;117;p3"/>
           <p:cNvSpPr txBox="1"/>
           <p:nvPr/>
         </p:nvSpPr>
@@ -13871,7 +15037,7 @@
       </p:sp>
       <p:grpSp>
         <p:nvGrpSpPr>
-          <p:cNvPr id="114" name="Google Shape;114;p3"/>
+          <p:cNvPr id="118" name="Google Shape;118;p3"/>
           <p:cNvGrpSpPr/>
           <p:nvPr/>
         </p:nvGrpSpPr>
@@ -13885,7 +15051,7 @@
         </p:grpSpPr>
         <p:sp>
           <p:nvSpPr>
-            <p:cNvPr id="115" name="Google Shape;115;p3"/>
+            <p:cNvPr id="119" name="Google Shape;119;p3"/>
             <p:cNvSpPr/>
             <p:nvPr/>
           </p:nvSpPr>
@@ -13938,7 +15104,7 @@
         </p:sp>
         <p:pic>
           <p:nvPicPr>
-            <p:cNvPr descr="image.png" id="116" name="Google Shape;116;p3"/>
+            <p:cNvPr descr="image.png" id="120" name="Google Shape;120;p3"/>
             <p:cNvPicPr preferRelativeResize="0"/>
             <p:nvPr/>
           </p:nvPicPr>
@@ -13965,7 +15131,7 @@
         </p:pic>
         <p:sp>
           <p:nvSpPr>
-            <p:cNvPr id="117" name="Google Shape;117;p3"/>
+            <p:cNvPr id="121" name="Google Shape;121;p3"/>
             <p:cNvSpPr txBox="1"/>
             <p:nvPr/>
           </p:nvSpPr>
@@ -14015,7 +15181,7 @@
         </p:sp>
         <p:sp>
           <p:nvSpPr>
-            <p:cNvPr id="118" name="Google Shape;118;p3"/>
+            <p:cNvPr id="122" name="Google Shape;122;p3"/>
             <p:cNvSpPr txBox="1"/>
             <p:nvPr/>
           </p:nvSpPr>
@@ -14538,7 +15704,7 @@
     </p:bg>
     <p:spTree>
       <p:nvGrpSpPr>
-        <p:cNvPr id="122" name="Shape 122"/>
+        <p:cNvPr id="126" name="Shape 126"/>
         <p:cNvGrpSpPr/>
         <p:nvPr/>
       </p:nvGrpSpPr>
@@ -14552,7 +15718,7 @@
       </p:grpSpPr>
       <p:grpSp>
         <p:nvGrpSpPr>
-          <p:cNvPr id="123" name="Google Shape;123;h1051ff8d553358a1_0_47"/>
+          <p:cNvPr id="127" name="Google Shape;127;h1051ff8d553358a1_0_47"/>
           <p:cNvGrpSpPr/>
           <p:nvPr/>
         </p:nvGrpSpPr>
@@ -14566,7 +15732,7 @@
         </p:grpSpPr>
         <p:sp>
           <p:nvSpPr>
-            <p:cNvPr id="124" name="Google Shape;124;h1051ff8d553358a1_0_47"/>
+            <p:cNvPr id="128" name="Google Shape;128;h1051ff8d553358a1_0_47"/>
             <p:cNvSpPr txBox="1"/>
             <p:nvPr/>
           </p:nvSpPr>
@@ -14616,7 +15782,7 @@
         </p:sp>
         <p:sp>
           <p:nvSpPr>
-            <p:cNvPr id="125" name="Google Shape;125;h1051ff8d553358a1_0_47"/>
+            <p:cNvPr id="129" name="Google Shape;129;h1051ff8d553358a1_0_47"/>
             <p:cNvSpPr txBox="1"/>
             <p:nvPr/>
           </p:nvSpPr>
@@ -14729,7 +15895,7 @@
         </p:sp>
         <p:sp>
           <p:nvSpPr>
-            <p:cNvPr id="126" name="Google Shape;126;h1051ff8d553358a1_0_47"/>
+            <p:cNvPr id="130" name="Google Shape;130;h1051ff8d553358a1_0_47"/>
             <p:cNvSpPr txBox="1"/>
             <p:nvPr/>
           </p:nvSpPr>
@@ -14802,7 +15968,7 @@
         </p:sp>
         <p:sp>
           <p:nvSpPr>
-            <p:cNvPr id="127" name="Google Shape;127;h1051ff8d553358a1_0_47"/>
+            <p:cNvPr id="131" name="Google Shape;131;h1051ff8d553358a1_0_47"/>
             <p:cNvSpPr txBox="1"/>
             <p:nvPr/>
           </p:nvSpPr>
@@ -14884,7 +16050,7 @@
         </p:sp>
         <p:sp>
           <p:nvSpPr>
-            <p:cNvPr id="128" name="Google Shape;128;h1051ff8d553358a1_0_47"/>
+            <p:cNvPr id="132" name="Google Shape;132;h1051ff8d553358a1_0_47"/>
             <p:cNvSpPr/>
             <p:nvPr/>
           </p:nvSpPr>
@@ -14938,7 +16104,7 @@
       </p:grpSp>
       <p:sp>
         <p:nvSpPr>
-          <p:cNvPr id="129" name="Google Shape;129;h1051ff8d553358a1_0_47"/>
+          <p:cNvPr id="133" name="Google Shape;133;h1051ff8d553358a1_0_47"/>
           <p:cNvSpPr txBox="1"/>
           <p:nvPr/>
         </p:nvSpPr>
@@ -14992,7 +16158,7 @@
       </p:sp>
       <p:sp>
         <p:nvSpPr>
-          <p:cNvPr id="130" name="Google Shape;130;h1051ff8d553358a1_0_47"/>
+          <p:cNvPr id="134" name="Google Shape;134;h1051ff8d553358a1_0_47"/>
           <p:cNvSpPr txBox="1"/>
           <p:nvPr/>
         </p:nvSpPr>
@@ -15050,7 +16216,7 @@
       </p:sp>
       <p:sp>
         <p:nvSpPr>
-          <p:cNvPr id="131" name="Google Shape;131;h1051ff8d553358a1_0_47"/>
+          <p:cNvPr id="135" name="Google Shape;135;h1051ff8d553358a1_0_47"/>
           <p:cNvSpPr/>
           <p:nvPr/>
         </p:nvSpPr>
@@ -15103,7 +16269,7 @@
       </p:sp>
       <p:sp>
         <p:nvSpPr>
-          <p:cNvPr id="132" name="Google Shape;132;h1051ff8d553358a1_0_47"/>
+          <p:cNvPr id="136" name="Google Shape;136;h1051ff8d553358a1_0_47"/>
           <p:cNvSpPr txBox="1"/>
           <p:nvPr/>
         </p:nvSpPr>
@@ -15153,7 +16319,7 @@
       </p:sp>
       <p:sp>
         <p:nvSpPr>
-          <p:cNvPr id="133" name="Google Shape;133;h1051ff8d553358a1_0_47"/>
+          <p:cNvPr id="137" name="Google Shape;137;h1051ff8d553358a1_0_47"/>
           <p:cNvSpPr txBox="1"/>
           <p:nvPr/>
         </p:nvSpPr>
@@ -15588,7 +16754,7 @@
       </p:sp>
       <p:pic>
         <p:nvPicPr>
-          <p:cNvPr descr="image.png" id="134" name="Google Shape;134;h1051ff8d553358a1_0_47"/>
+          <p:cNvPr descr="image.png" id="138" name="Google Shape;138;h1051ff8d553358a1_0_47"/>
           <p:cNvPicPr preferRelativeResize="0"/>
           <p:nvPr/>
         </p:nvPicPr>
@@ -15616,7 +16782,7 @@
       </p:pic>
       <p:pic>
         <p:nvPicPr>
-          <p:cNvPr descr="image.png" id="135" name="Google Shape;135;h1051ff8d553358a1_0_47"/>
+          <p:cNvPr descr="image.png" id="139" name="Google Shape;139;h1051ff8d553358a1_0_47"/>
           <p:cNvPicPr preferRelativeResize="0"/>
           <p:nvPr/>
         </p:nvPicPr>
@@ -15643,7 +16809,7 @@
       </p:pic>
       <p:sp>
         <p:nvSpPr>
-          <p:cNvPr id="136" name="Google Shape;136;h1051ff8d553358a1_0_47"/>
+          <p:cNvPr id="140" name="Google Shape;140;h1051ff8d553358a1_0_47"/>
           <p:cNvSpPr txBox="1"/>
           <p:nvPr/>
         </p:nvSpPr>
@@ -15693,7 +16859,7 @@
       </p:sp>
       <p:sp>
         <p:nvSpPr>
-          <p:cNvPr id="137" name="Google Shape;137;h1051ff8d553358a1_0_47"/>
+          <p:cNvPr id="141" name="Google Shape;141;h1051ff8d553358a1_0_47"/>
           <p:cNvSpPr txBox="1"/>
           <p:nvPr/>
         </p:nvSpPr>
@@ -15963,7 +17129,7 @@
     </p:bg>
     <p:spTree>
       <p:nvGrpSpPr>
-        <p:cNvPr id="141" name="Shape 141"/>
+        <p:cNvPr id="145" name="Shape 145"/>
         <p:cNvGrpSpPr/>
         <p:nvPr/>
       </p:nvGrpSpPr>
@@ -15977,13 +17143,13 @@
       </p:grpSpPr>
       <p:sp>
         <p:nvSpPr>
-          <p:cNvPr id="142" name="Google Shape;142;p4"/>
+          <p:cNvPr id="146" name="Google Shape;146;p4"/>
           <p:cNvSpPr txBox="1"/>
           <p:nvPr/>
         </p:nvSpPr>
         <p:spPr>
           <a:xfrm>
-            <a:off x="605625" y="633449"/>
+            <a:off x="605625" y="891357"/>
             <a:ext cx="5860800" cy="461700"/>
           </a:xfrm>
           <a:prstGeom prst="rect">
@@ -16030,13 +17196,13 @@
       </p:sp>
       <p:sp>
         <p:nvSpPr>
-          <p:cNvPr id="143" name="Google Shape;143;p4"/>
+          <p:cNvPr id="147" name="Google Shape;147;p4"/>
           <p:cNvSpPr txBox="1"/>
           <p:nvPr/>
         </p:nvSpPr>
         <p:spPr>
           <a:xfrm>
-            <a:off x="4509725" y="3064787"/>
+            <a:off x="4428285" y="3127379"/>
             <a:ext cx="6858000" cy="277200"/>
           </a:xfrm>
           <a:prstGeom prst="rect">
@@ -16080,13 +17246,13 @@
       </p:sp>
       <p:sp>
         <p:nvSpPr>
-          <p:cNvPr id="144" name="Google Shape;144;p4"/>
+          <p:cNvPr id="148" name="Google Shape;148;p4"/>
           <p:cNvSpPr txBox="1"/>
           <p:nvPr/>
         </p:nvSpPr>
         <p:spPr>
           <a:xfrm>
-            <a:off x="4509725" y="3431375"/>
+            <a:off x="4428285" y="3493967"/>
             <a:ext cx="6858000" cy="415500"/>
           </a:xfrm>
           <a:prstGeom prst="rect">
@@ -16133,13 +17299,13 @@
       </p:sp>
       <p:sp>
         <p:nvSpPr>
-          <p:cNvPr id="145" name="Google Shape;145;p4"/>
+          <p:cNvPr id="149" name="Google Shape;149;p4"/>
           <p:cNvSpPr txBox="1"/>
           <p:nvPr/>
         </p:nvSpPr>
         <p:spPr>
           <a:xfrm>
-            <a:off x="4509725" y="4253637"/>
+            <a:off x="4428285" y="4316229"/>
             <a:ext cx="6858000" cy="277200"/>
           </a:xfrm>
           <a:prstGeom prst="rect">
@@ -16183,13 +17349,13 @@
       </p:sp>
       <p:sp>
         <p:nvSpPr>
-          <p:cNvPr id="146" name="Google Shape;146;p4"/>
+          <p:cNvPr id="150" name="Google Shape;150;p4"/>
           <p:cNvSpPr txBox="1"/>
           <p:nvPr/>
         </p:nvSpPr>
         <p:spPr>
           <a:xfrm>
-            <a:off x="4509725" y="4615587"/>
+            <a:off x="4428285" y="4678179"/>
             <a:ext cx="6858000" cy="415500"/>
           </a:xfrm>
           <a:prstGeom prst="rect">
@@ -16233,7 +17399,7 @@
       </p:sp>
       <p:pic>
         <p:nvPicPr>
-          <p:cNvPr id="147" name="Google Shape;147;p4"/>
+          <p:cNvPr id="151" name="Google Shape;151;p4"/>
           <p:cNvPicPr preferRelativeResize="0"/>
           <p:nvPr/>
         </p:nvPicPr>
@@ -16247,7 +17413,7 @@
         </p:blipFill>
         <p:spPr>
           <a:xfrm>
-            <a:off x="768606" y="1974063"/>
+            <a:off x="687166" y="2036655"/>
             <a:ext cx="3044594" cy="2909875"/>
           </a:xfrm>
           <a:prstGeom prst="rect">
@@ -16261,13 +17427,13 @@
       </p:pic>
       <p:sp>
         <p:nvSpPr>
-          <p:cNvPr id="148" name="Google Shape;148;p4"/>
+          <p:cNvPr id="152" name="Google Shape;152;p4"/>
           <p:cNvSpPr txBox="1"/>
           <p:nvPr/>
         </p:nvSpPr>
         <p:spPr>
           <a:xfrm>
-            <a:off x="4509725" y="1833287"/>
+            <a:off x="4428285" y="1895879"/>
             <a:ext cx="6858000" cy="277200"/>
           </a:xfrm>
           <a:prstGeom prst="rect">
@@ -16311,13 +17477,13 @@
       </p:sp>
       <p:sp>
         <p:nvSpPr>
-          <p:cNvPr id="149" name="Google Shape;149;p4"/>
+          <p:cNvPr id="153" name="Google Shape;153;p4"/>
           <p:cNvSpPr txBox="1"/>
           <p:nvPr/>
         </p:nvSpPr>
         <p:spPr>
           <a:xfrm>
-            <a:off x="4509725" y="2223308"/>
+            <a:off x="4428285" y="2285900"/>
             <a:ext cx="6858000" cy="415500"/>
           </a:xfrm>
           <a:prstGeom prst="rect">
@@ -16361,7 +17527,7 @@
       </p:sp>
       <p:sp>
         <p:nvSpPr>
-          <p:cNvPr id="150" name="Google Shape;150;p4"/>
+          <p:cNvPr id="154" name="Google Shape;154;p4"/>
           <p:cNvSpPr/>
           <p:nvPr/>
         </p:nvSpPr>
@@ -16417,7 +17583,7 @@
       </p:sp>
       <p:sp>
         <p:nvSpPr>
-          <p:cNvPr id="151" name="Google Shape;151;p4"/>
+          <p:cNvPr id="155" name="Google Shape;155;p4"/>
           <p:cNvSpPr txBox="1"/>
           <p:nvPr/>
         </p:nvSpPr>
@@ -16469,6 +17635,60 @@
           </a:p>
         </p:txBody>
       </p:sp>
+      <p:sp>
+        <p:nvSpPr>
+          <p:cNvPr id="156" name="Google Shape;156;p4"/>
+          <p:cNvSpPr txBox="1"/>
+          <p:nvPr/>
+        </p:nvSpPr>
+        <p:spPr>
+          <a:xfrm>
+            <a:off x="609600" y="609600"/>
+            <a:ext cx="11582400" cy="184800"/>
+          </a:xfrm>
+          <a:prstGeom prst="rect">
+            <a:avLst/>
+          </a:prstGeom>
+          <a:noFill/>
+          <a:ln>
+            <a:noFill/>
+          </a:ln>
+        </p:spPr>
+        <p:txBody>
+          <a:bodyPr anchorCtr="0" anchor="t" bIns="0" lIns="0" spcFirstLastPara="1" rIns="0" wrap="square" tIns="0">
+            <a:spAutoFit/>
+          </a:bodyPr>
+          <a:lstStyle/>
+          <a:p>
+            <a:pPr indent="0" lvl="0" marL="0" marR="0" rtl="0" algn="l">
+              <a:spcBef>
+                <a:spcPts val="0"/>
+              </a:spcBef>
+              <a:spcAft>
+                <a:spcPts val="0"/>
+              </a:spcAft>
+              <a:buNone/>
+            </a:pPr>
+            <a:r>
+              <a:rPr b="1" i="0" lang="en-US" sz="1200" u="none" cap="none" strike="noStrike">
+                <a:solidFill>
+                  <a:srgbClr val="6DACBE"/>
+                </a:solidFill>
+                <a:latin typeface="Plus Jakarta Sans"/>
+                <a:ea typeface="Plus Jakarta Sans"/>
+                <a:cs typeface="Plus Jakarta Sans"/>
+                <a:sym typeface="Plus Jakarta Sans"/>
+              </a:rPr>
+              <a:t>FOUNDATION</a:t>
+            </a:r>
+            <a:endParaRPr>
+              <a:solidFill>
+                <a:srgbClr val="6DACBE"/>
+              </a:solidFill>
+            </a:endParaRPr>
+          </a:p>
+        </p:txBody>
+      </p:sp>
     </p:spTree>
   </p:cSld>
   <p:clrMapOvr>
@@ -16480,6 +17700,1226 @@
 <file path=ppt/slides/slide6.xml><?xml version="1.0" encoding="utf-8"?>
 <p:sld xmlns:a="http://schemas.openxmlformats.org/drawingml/2006/main" xmlns:r="http://schemas.openxmlformats.org/officeDocument/2006/relationships" xmlns:mc="http://schemas.openxmlformats.org/markup-compatibility/2006" xmlns:mv="urn:schemas-microsoft-com:mac:vml" xmlns:p="http://schemas.openxmlformats.org/presentationml/2006/main" xmlns:c="http://schemas.openxmlformats.org/drawingml/2006/chart" xmlns:dgm="http://schemas.openxmlformats.org/drawingml/2006/diagram" xmlns:o="urn:schemas-microsoft-com:office:office" xmlns:v="urn:schemas-microsoft-com:vml" xmlns:pvml="urn:schemas-microsoft-com:office:powerpoint" xmlns:com="http://schemas.openxmlformats.org/drawingml/2006/compatibility" xmlns:p14="http://schemas.microsoft.com/office/powerpoint/2010/main" xmlns:p15="http://schemas.microsoft.com/office/powerpoint/2012/main" xmlns:ahyp="http://schemas.microsoft.com/office/drawing/2018/hyperlinkcolor">
   <p:cSld>
+    <p:spTree>
+      <p:nvGrpSpPr>
+        <p:cNvPr id="160" name="Shape 160"/>
+        <p:cNvGrpSpPr/>
+        <p:nvPr/>
+      </p:nvGrpSpPr>
+      <p:grpSpPr>
+        <a:xfrm>
+          <a:off x="0" y="0"/>
+          <a:ext cx="0" cy="0"/>
+          <a:chOff x="0" y="0"/>
+          <a:chExt cx="0" cy="0"/>
+        </a:xfrm>
+      </p:grpSpPr>
+      <p:pic>
+        <p:nvPicPr>
+          <p:cNvPr descr="image.png" id="161" name="Google Shape;161;h1d6895f2cb059417_2_0"/>
+          <p:cNvPicPr preferRelativeResize="0"/>
+          <p:nvPr/>
+        </p:nvPicPr>
+        <p:blipFill rotWithShape="1">
+          <a:blip r:embed="rId3">
+            <a:alphaModFix/>
+          </a:blip>
+          <a:srcRect b="0" l="0" r="0" t="0"/>
+          <a:stretch/>
+        </p:blipFill>
+        <p:spPr>
+          <a:xfrm>
+            <a:off x="1965188" y="1968748"/>
+            <a:ext cx="762000" cy="762000"/>
+          </a:xfrm>
+          <a:prstGeom prst="rect">
+            <a:avLst/>
+          </a:prstGeom>
+          <a:noFill/>
+          <a:ln>
+            <a:noFill/>
+          </a:ln>
+        </p:spPr>
+      </p:pic>
+      <p:pic>
+        <p:nvPicPr>
+          <p:cNvPr descr="image.png" id="162" name="Google Shape;162;h1d6895f2cb059417_2_0"/>
+          <p:cNvPicPr preferRelativeResize="0"/>
+          <p:nvPr/>
+        </p:nvPicPr>
+        <p:blipFill rotWithShape="1">
+          <a:blip r:embed="rId4">
+            <a:alphaModFix/>
+          </a:blip>
+          <a:srcRect b="0" l="0" r="0" t="0"/>
+          <a:stretch/>
+        </p:blipFill>
+        <p:spPr>
+          <a:xfrm>
+            <a:off x="5724438" y="1968748"/>
+            <a:ext cx="762000" cy="762000"/>
+          </a:xfrm>
+          <a:prstGeom prst="rect">
+            <a:avLst/>
+          </a:prstGeom>
+          <a:noFill/>
+          <a:ln>
+            <a:noFill/>
+          </a:ln>
+        </p:spPr>
+      </p:pic>
+      <p:pic>
+        <p:nvPicPr>
+          <p:cNvPr descr="image.png" id="163" name="Google Shape;163;h1d6895f2cb059417_2_0"/>
+          <p:cNvPicPr preferRelativeResize="0"/>
+          <p:nvPr/>
+        </p:nvPicPr>
+        <p:blipFill rotWithShape="1">
+          <a:blip r:embed="rId5">
+            <a:alphaModFix/>
+          </a:blip>
+          <a:srcRect b="0" l="0" r="0" t="0"/>
+          <a:stretch/>
+        </p:blipFill>
+        <p:spPr>
+          <a:xfrm>
+            <a:off x="9483686" y="1968748"/>
+            <a:ext cx="762000" cy="762000"/>
+          </a:xfrm>
+          <a:prstGeom prst="rect">
+            <a:avLst/>
+          </a:prstGeom>
+          <a:noFill/>
+          <a:ln>
+            <a:noFill/>
+          </a:ln>
+        </p:spPr>
+      </p:pic>
+      <p:pic>
+        <p:nvPicPr>
+          <p:cNvPr descr="image.png" id="164" name="Google Shape;164;h1d6895f2cb059417_2_0"/>
+          <p:cNvPicPr preferRelativeResize="0"/>
+          <p:nvPr/>
+        </p:nvPicPr>
+        <p:blipFill rotWithShape="1">
+          <a:blip r:embed="rId6">
+            <a:alphaModFix/>
+          </a:blip>
+          <a:srcRect b="0" l="0" r="0" t="0"/>
+          <a:stretch/>
+        </p:blipFill>
+        <p:spPr>
+          <a:xfrm>
+            <a:off x="2193788" y="2197348"/>
+            <a:ext cx="304800" cy="304800"/>
+          </a:xfrm>
+          <a:prstGeom prst="rect">
+            <a:avLst/>
+          </a:prstGeom>
+          <a:noFill/>
+          <a:ln>
+            <a:noFill/>
+          </a:ln>
+        </p:spPr>
+      </p:pic>
+      <p:pic>
+        <p:nvPicPr>
+          <p:cNvPr descr="image.png" id="165" name="Google Shape;165;h1d6895f2cb059417_2_0"/>
+          <p:cNvPicPr preferRelativeResize="0"/>
+          <p:nvPr/>
+        </p:nvPicPr>
+        <p:blipFill rotWithShape="1">
+          <a:blip r:embed="rId7">
+            <a:alphaModFix/>
+          </a:blip>
+          <a:srcRect b="0" l="0" r="0" t="0"/>
+          <a:stretch/>
+        </p:blipFill>
+        <p:spPr>
+          <a:xfrm>
+            <a:off x="5991138" y="2197348"/>
+            <a:ext cx="228600" cy="304800"/>
+          </a:xfrm>
+          <a:prstGeom prst="rect">
+            <a:avLst/>
+          </a:prstGeom>
+          <a:noFill/>
+          <a:ln>
+            <a:noFill/>
+          </a:ln>
+        </p:spPr>
+      </p:pic>
+      <p:pic>
+        <p:nvPicPr>
+          <p:cNvPr descr="image.png" id="166" name="Google Shape;166;h1d6895f2cb059417_2_0"/>
+          <p:cNvPicPr preferRelativeResize="0"/>
+          <p:nvPr/>
+        </p:nvPicPr>
+        <p:blipFill rotWithShape="1">
+          <a:blip r:embed="rId8">
+            <a:alphaModFix/>
+          </a:blip>
+          <a:srcRect b="0" l="0" r="0" t="0"/>
+          <a:stretch/>
+        </p:blipFill>
+        <p:spPr>
+          <a:xfrm>
+            <a:off x="9731337" y="2197348"/>
+            <a:ext cx="266700" cy="304800"/>
+          </a:xfrm>
+          <a:prstGeom prst="rect">
+            <a:avLst/>
+          </a:prstGeom>
+          <a:noFill/>
+          <a:ln>
+            <a:noFill/>
+          </a:ln>
+        </p:spPr>
+      </p:pic>
+      <p:sp>
+        <p:nvSpPr>
+          <p:cNvPr id="167" name="Google Shape;167;h1d6895f2cb059417_2_0"/>
+          <p:cNvSpPr txBox="1"/>
+          <p:nvPr/>
+        </p:nvSpPr>
+        <p:spPr>
+          <a:xfrm>
+            <a:off x="79279" y="2959348"/>
+            <a:ext cx="4533900" cy="277200"/>
+          </a:xfrm>
+          <a:prstGeom prst="rect">
+            <a:avLst/>
+          </a:prstGeom>
+          <a:noFill/>
+          <a:ln>
+            <a:noFill/>
+          </a:ln>
+        </p:spPr>
+        <p:txBody>
+          <a:bodyPr anchorCtr="0" anchor="t" bIns="0" lIns="0" spcFirstLastPara="1" rIns="0" wrap="square" tIns="0">
+            <a:spAutoFit/>
+          </a:bodyPr>
+          <a:lstStyle/>
+          <a:p>
+            <a:pPr indent="0" lvl="0" marL="0" marR="0" rtl="0" algn="ctr">
+              <a:spcBef>
+                <a:spcPts val="0"/>
+              </a:spcBef>
+              <a:spcAft>
+                <a:spcPts val="0"/>
+              </a:spcAft>
+              <a:buNone/>
+            </a:pPr>
+            <a:r>
+              <a:rPr b="1" lang="en-US" sz="1800">
+                <a:solidFill>
+                  <a:srgbClr val="0F172A"/>
+                </a:solidFill>
+                <a:latin typeface="Plus Jakarta Sans"/>
+                <a:ea typeface="Plus Jakarta Sans"/>
+                <a:cs typeface="Plus Jakarta Sans"/>
+                <a:sym typeface="Plus Jakarta Sans"/>
+              </a:rPr>
+              <a:t>Prompts</a:t>
+            </a:r>
+            <a:endParaRPr/>
+          </a:p>
+        </p:txBody>
+      </p:sp>
+      <p:sp>
+        <p:nvSpPr>
+          <p:cNvPr id="168" name="Google Shape;168;h1d6895f2cb059417_2_0"/>
+          <p:cNvSpPr txBox="1"/>
+          <p:nvPr/>
+        </p:nvSpPr>
+        <p:spPr>
+          <a:xfrm>
+            <a:off x="3838529" y="2959348"/>
+            <a:ext cx="4533900" cy="277200"/>
+          </a:xfrm>
+          <a:prstGeom prst="rect">
+            <a:avLst/>
+          </a:prstGeom>
+          <a:noFill/>
+          <a:ln>
+            <a:noFill/>
+          </a:ln>
+        </p:spPr>
+        <p:txBody>
+          <a:bodyPr anchorCtr="0" anchor="t" bIns="0" lIns="0" spcFirstLastPara="1" rIns="0" wrap="square" tIns="0">
+            <a:spAutoFit/>
+          </a:bodyPr>
+          <a:lstStyle/>
+          <a:p>
+            <a:pPr indent="0" lvl="0" marL="0" marR="0" rtl="0" algn="ctr">
+              <a:spcBef>
+                <a:spcPts val="0"/>
+              </a:spcBef>
+              <a:spcAft>
+                <a:spcPts val="0"/>
+              </a:spcAft>
+              <a:buNone/>
+            </a:pPr>
+            <a:r>
+              <a:rPr b="1" lang="en-US" sz="1800">
+                <a:latin typeface="Plus Jakarta Sans"/>
+                <a:ea typeface="Plus Jakarta Sans"/>
+                <a:cs typeface="Plus Jakarta Sans"/>
+                <a:sym typeface="Plus Jakarta Sans"/>
+              </a:rPr>
+              <a:t>agens.md</a:t>
+            </a:r>
+            <a:r>
+              <a:rPr b="1" lang="en-US" sz="1800">
+                <a:solidFill>
+                  <a:srgbClr val="0F172A"/>
+                </a:solidFill>
+                <a:latin typeface="Plus Jakarta Sans"/>
+                <a:ea typeface="Plus Jakarta Sans"/>
+                <a:cs typeface="Plus Jakarta Sans"/>
+                <a:sym typeface="Plus Jakarta Sans"/>
+              </a:rPr>
+              <a:t> file</a:t>
+            </a:r>
+            <a:endParaRPr/>
+          </a:p>
+        </p:txBody>
+      </p:sp>
+      <p:sp>
+        <p:nvSpPr>
+          <p:cNvPr id="169" name="Google Shape;169;h1d6895f2cb059417_2_0"/>
+          <p:cNvSpPr txBox="1"/>
+          <p:nvPr/>
+        </p:nvSpPr>
+        <p:spPr>
+          <a:xfrm>
+            <a:off x="4439286" y="3397502"/>
+            <a:ext cx="3332400" cy="831300"/>
+          </a:xfrm>
+          <a:prstGeom prst="rect">
+            <a:avLst/>
+          </a:prstGeom>
+          <a:noFill/>
+          <a:ln>
+            <a:noFill/>
+          </a:ln>
+        </p:spPr>
+        <p:txBody>
+          <a:bodyPr anchorCtr="0" anchor="t" bIns="0" lIns="0" spcFirstLastPara="1" rIns="0" wrap="square" tIns="0">
+            <a:spAutoFit/>
+          </a:bodyPr>
+          <a:lstStyle/>
+          <a:p>
+            <a:pPr indent="0" lvl="0" marL="0" marR="0" rtl="0" algn="l">
+              <a:spcBef>
+                <a:spcPts val="0"/>
+              </a:spcBef>
+              <a:spcAft>
+                <a:spcPts val="0"/>
+              </a:spcAft>
+              <a:buNone/>
+            </a:pPr>
+            <a:r>
+              <a:rPr lang="en-US" sz="1350">
+                <a:solidFill>
+                  <a:srgbClr val="475569"/>
+                </a:solidFill>
+                <a:latin typeface="Plus Jakarta Sans"/>
+                <a:ea typeface="Plus Jakarta Sans"/>
+                <a:cs typeface="Plus Jakarta Sans"/>
+                <a:sym typeface="Plus Jakarta Sans"/>
+              </a:rPr>
+              <a:t>Agents file rule AI coding agents</a:t>
+            </a:r>
+            <a:endParaRPr sz="1350">
+              <a:solidFill>
+                <a:srgbClr val="475569"/>
+              </a:solidFill>
+              <a:latin typeface="Plus Jakarta Sans"/>
+              <a:ea typeface="Plus Jakarta Sans"/>
+              <a:cs typeface="Plus Jakarta Sans"/>
+              <a:sym typeface="Plus Jakarta Sans"/>
+            </a:endParaRPr>
+          </a:p>
+          <a:p>
+            <a:pPr indent="-314325" lvl="0" marL="457200" marR="0" rtl="0" algn="l">
+              <a:spcBef>
+                <a:spcPts val="0"/>
+              </a:spcBef>
+              <a:spcAft>
+                <a:spcPts val="0"/>
+              </a:spcAft>
+              <a:buClr>
+                <a:srgbClr val="475569"/>
+              </a:buClr>
+              <a:buSzPts val="1350"/>
+              <a:buFont typeface="Plus Jakarta Sans"/>
+              <a:buChar char="●"/>
+            </a:pPr>
+            <a:r>
+              <a:rPr lang="en-US" sz="1350">
+                <a:solidFill>
+                  <a:srgbClr val="475569"/>
+                </a:solidFill>
+                <a:latin typeface="Plus Jakarta Sans"/>
+                <a:ea typeface="Plus Jakarta Sans"/>
+                <a:cs typeface="Plus Jakarta Sans"/>
+                <a:sym typeface="Plus Jakarta Sans"/>
+              </a:rPr>
+              <a:t>stack, the run command</a:t>
+            </a:r>
+            <a:endParaRPr sz="1350">
+              <a:solidFill>
+                <a:srgbClr val="475569"/>
+              </a:solidFill>
+              <a:latin typeface="Plus Jakarta Sans"/>
+              <a:ea typeface="Plus Jakarta Sans"/>
+              <a:cs typeface="Plus Jakarta Sans"/>
+              <a:sym typeface="Plus Jakarta Sans"/>
+            </a:endParaRPr>
+          </a:p>
+          <a:p>
+            <a:pPr indent="-314325" lvl="0" marL="457200" marR="0" rtl="0" algn="l">
+              <a:spcBef>
+                <a:spcPts val="0"/>
+              </a:spcBef>
+              <a:spcAft>
+                <a:spcPts val="0"/>
+              </a:spcAft>
+              <a:buClr>
+                <a:srgbClr val="475569"/>
+              </a:buClr>
+              <a:buSzPts val="1350"/>
+              <a:buFont typeface="Plus Jakarta Sans"/>
+              <a:buChar char="●"/>
+            </a:pPr>
+            <a:r>
+              <a:rPr lang="en-US" sz="1350">
+                <a:solidFill>
+                  <a:srgbClr val="475569"/>
+                </a:solidFill>
+                <a:latin typeface="Plus Jakarta Sans"/>
+                <a:ea typeface="Plus Jakarta Sans"/>
+                <a:cs typeface="Plus Jakarta Sans"/>
+                <a:sym typeface="Plus Jakarta Sans"/>
+              </a:rPr>
+              <a:t>which file does which job</a:t>
+            </a:r>
+            <a:endParaRPr sz="1350">
+              <a:solidFill>
+                <a:srgbClr val="475569"/>
+              </a:solidFill>
+              <a:latin typeface="Plus Jakarta Sans"/>
+              <a:ea typeface="Plus Jakarta Sans"/>
+              <a:cs typeface="Plus Jakarta Sans"/>
+              <a:sym typeface="Plus Jakarta Sans"/>
+            </a:endParaRPr>
+          </a:p>
+          <a:p>
+            <a:pPr indent="-314325" lvl="0" marL="457200" marR="0" rtl="0" algn="l">
+              <a:spcBef>
+                <a:spcPts val="0"/>
+              </a:spcBef>
+              <a:spcAft>
+                <a:spcPts val="0"/>
+              </a:spcAft>
+              <a:buClr>
+                <a:srgbClr val="475569"/>
+              </a:buClr>
+              <a:buSzPts val="1350"/>
+              <a:buFont typeface="Plus Jakarta Sans"/>
+              <a:buChar char="●"/>
+            </a:pPr>
+            <a:r>
+              <a:rPr lang="en-US" sz="1350">
+                <a:solidFill>
+                  <a:srgbClr val="475569"/>
+                </a:solidFill>
+                <a:latin typeface="Plus Jakarta Sans"/>
+                <a:ea typeface="Plus Jakarta Sans"/>
+                <a:cs typeface="Plus Jakarta Sans"/>
+                <a:sym typeface="Plus Jakarta Sans"/>
+              </a:rPr>
+              <a:t>and a never-do list (e.g.: .env file)</a:t>
+            </a:r>
+            <a:endParaRPr/>
+          </a:p>
+        </p:txBody>
+      </p:sp>
+      <p:sp>
+        <p:nvSpPr>
+          <p:cNvPr id="170" name="Google Shape;170;h1d6895f2cb059417_2_0"/>
+          <p:cNvSpPr txBox="1"/>
+          <p:nvPr/>
+        </p:nvSpPr>
+        <p:spPr>
+          <a:xfrm>
+            <a:off x="7616908" y="2959348"/>
+            <a:ext cx="4495800" cy="277200"/>
+          </a:xfrm>
+          <a:prstGeom prst="rect">
+            <a:avLst/>
+          </a:prstGeom>
+          <a:noFill/>
+          <a:ln>
+            <a:noFill/>
+          </a:ln>
+        </p:spPr>
+        <p:txBody>
+          <a:bodyPr anchorCtr="0" anchor="t" bIns="0" lIns="0" spcFirstLastPara="1" rIns="0" wrap="square" tIns="0">
+            <a:spAutoFit/>
+          </a:bodyPr>
+          <a:lstStyle/>
+          <a:p>
+            <a:pPr indent="0" lvl="0" marL="0" marR="0" rtl="0" algn="ctr">
+              <a:spcBef>
+                <a:spcPts val="0"/>
+              </a:spcBef>
+              <a:spcAft>
+                <a:spcPts val="0"/>
+              </a:spcAft>
+              <a:buNone/>
+            </a:pPr>
+            <a:r>
+              <a:rPr b="1" lang="en-US" sz="1800">
+                <a:solidFill>
+                  <a:srgbClr val="0F172A"/>
+                </a:solidFill>
+                <a:latin typeface="Plus Jakarta Sans"/>
+                <a:ea typeface="Plus Jakarta Sans"/>
+                <a:cs typeface="Plus Jakarta Sans"/>
+                <a:sym typeface="Plus Jakarta Sans"/>
+              </a:rPr>
+              <a:t>Stack</a:t>
+            </a:r>
+            <a:endParaRPr/>
+          </a:p>
+        </p:txBody>
+      </p:sp>
+      <p:sp>
+        <p:nvSpPr>
+          <p:cNvPr id="171" name="Google Shape;171;h1d6895f2cb059417_2_0"/>
+          <p:cNvSpPr txBox="1"/>
+          <p:nvPr/>
+        </p:nvSpPr>
+        <p:spPr>
+          <a:xfrm>
+            <a:off x="609600" y="609600"/>
+            <a:ext cx="11582400" cy="184800"/>
+          </a:xfrm>
+          <a:prstGeom prst="rect">
+            <a:avLst/>
+          </a:prstGeom>
+          <a:noFill/>
+          <a:ln>
+            <a:noFill/>
+          </a:ln>
+        </p:spPr>
+        <p:txBody>
+          <a:bodyPr anchorCtr="0" anchor="t" bIns="0" lIns="0" spcFirstLastPara="1" rIns="0" wrap="square" tIns="0">
+            <a:spAutoFit/>
+          </a:bodyPr>
+          <a:lstStyle/>
+          <a:p>
+            <a:pPr indent="0" lvl="0" marL="0" marR="0" rtl="0" algn="l">
+              <a:spcBef>
+                <a:spcPts val="0"/>
+              </a:spcBef>
+              <a:spcAft>
+                <a:spcPts val="0"/>
+              </a:spcAft>
+              <a:buNone/>
+            </a:pPr>
+            <a:r>
+              <a:rPr b="1" lang="en-US" sz="1200">
+                <a:solidFill>
+                  <a:srgbClr val="6DACBE"/>
+                </a:solidFill>
+                <a:latin typeface="Plus Jakarta Sans"/>
+                <a:ea typeface="Plus Jakarta Sans"/>
+                <a:cs typeface="Plus Jakarta Sans"/>
+                <a:sym typeface="Plus Jakarta Sans"/>
+              </a:rPr>
+              <a:t>TECHNICAL</a:t>
+            </a:r>
+            <a:endParaRPr>
+              <a:solidFill>
+                <a:srgbClr val="6DACBE"/>
+              </a:solidFill>
+            </a:endParaRPr>
+          </a:p>
+        </p:txBody>
+      </p:sp>
+      <p:sp>
+        <p:nvSpPr>
+          <p:cNvPr id="172" name="Google Shape;172;h1d6895f2cb059417_2_0"/>
+          <p:cNvSpPr txBox="1"/>
+          <p:nvPr/>
+        </p:nvSpPr>
+        <p:spPr>
+          <a:xfrm>
+            <a:off x="609600" y="962025"/>
+            <a:ext cx="11582400" cy="461700"/>
+          </a:xfrm>
+          <a:prstGeom prst="rect">
+            <a:avLst/>
+          </a:prstGeom>
+          <a:noFill/>
+          <a:ln>
+            <a:noFill/>
+          </a:ln>
+        </p:spPr>
+        <p:txBody>
+          <a:bodyPr anchorCtr="0" anchor="t" bIns="0" lIns="0" spcFirstLastPara="1" rIns="0" wrap="square" tIns="0">
+            <a:spAutoFit/>
+          </a:bodyPr>
+          <a:lstStyle/>
+          <a:p>
+            <a:pPr indent="0" lvl="0" marL="0" marR="0" rtl="0" algn="l">
+              <a:spcBef>
+                <a:spcPts val="0"/>
+              </a:spcBef>
+              <a:spcAft>
+                <a:spcPts val="0"/>
+              </a:spcAft>
+              <a:buNone/>
+            </a:pPr>
+            <a:r>
+              <a:rPr b="1" lang="en-US" sz="3000">
+                <a:solidFill>
+                  <a:srgbClr val="0F172A"/>
+                </a:solidFill>
+                <a:latin typeface="Plus Jakarta Sans"/>
+                <a:ea typeface="Plus Jakarta Sans"/>
+                <a:cs typeface="Plus Jakarta Sans"/>
+                <a:sym typeface="Plus Jakarta Sans"/>
+              </a:rPr>
+              <a:t>Implementations</a:t>
+            </a:r>
+            <a:endParaRPr/>
+          </a:p>
+        </p:txBody>
+      </p:sp>
+      <p:sp>
+        <p:nvSpPr>
+          <p:cNvPr id="173" name="Google Shape;173;h1d6895f2cb059417_2_0"/>
+          <p:cNvSpPr txBox="1"/>
+          <p:nvPr/>
+        </p:nvSpPr>
+        <p:spPr>
+          <a:xfrm>
+            <a:off x="679986" y="3397502"/>
+            <a:ext cx="3332400" cy="2701500"/>
+          </a:xfrm>
+          <a:prstGeom prst="rect">
+            <a:avLst/>
+          </a:prstGeom>
+          <a:noFill/>
+          <a:ln>
+            <a:noFill/>
+          </a:ln>
+        </p:spPr>
+        <p:txBody>
+          <a:bodyPr anchorCtr="0" anchor="t" bIns="0" lIns="0" spcFirstLastPara="1" rIns="0" wrap="square" tIns="0">
+            <a:spAutoFit/>
+          </a:bodyPr>
+          <a:lstStyle/>
+          <a:p>
+            <a:pPr indent="-314325" lvl="0" marL="457200" marR="0" rtl="0" algn="l">
+              <a:spcBef>
+                <a:spcPts val="0"/>
+              </a:spcBef>
+              <a:spcAft>
+                <a:spcPts val="0"/>
+              </a:spcAft>
+              <a:buClr>
+                <a:srgbClr val="475569"/>
+              </a:buClr>
+              <a:buSzPts val="1350"/>
+              <a:buFont typeface="Plus Jakarta Sans"/>
+              <a:buChar char="●"/>
+            </a:pPr>
+            <a:r>
+              <a:rPr lang="en-US" sz="1350">
+                <a:solidFill>
+                  <a:srgbClr val="475569"/>
+                </a:solidFill>
+                <a:latin typeface="Plus Jakarta Sans"/>
+                <a:ea typeface="Plus Jakarta Sans"/>
+                <a:cs typeface="Plus Jakarta Sans"/>
+                <a:sym typeface="Plus Jakarta Sans"/>
+              </a:rPr>
+              <a:t>Reusable templates generate content for marketing channels</a:t>
+            </a:r>
+            <a:endParaRPr sz="1350">
+              <a:solidFill>
+                <a:srgbClr val="475569"/>
+              </a:solidFill>
+              <a:latin typeface="Plus Jakarta Sans"/>
+              <a:ea typeface="Plus Jakarta Sans"/>
+              <a:cs typeface="Plus Jakarta Sans"/>
+              <a:sym typeface="Plus Jakarta Sans"/>
+            </a:endParaRPr>
+          </a:p>
+          <a:p>
+            <a:pPr indent="-314325" lvl="0" marL="457200" marR="0" rtl="0" algn="l">
+              <a:spcBef>
+                <a:spcPts val="0"/>
+              </a:spcBef>
+              <a:spcAft>
+                <a:spcPts val="0"/>
+              </a:spcAft>
+              <a:buClr>
+                <a:srgbClr val="475569"/>
+              </a:buClr>
+              <a:buSzPts val="1350"/>
+              <a:buFont typeface="Plus Jakarta Sans"/>
+              <a:buChar char="●"/>
+            </a:pPr>
+            <a:r>
+              <a:rPr lang="en-US" sz="1350">
+                <a:solidFill>
+                  <a:srgbClr val="475569"/>
+                </a:solidFill>
+                <a:latin typeface="Plus Jakarta Sans"/>
+                <a:ea typeface="Plus Jakarta Sans"/>
+                <a:cs typeface="Plus Jakarta Sans"/>
+                <a:sym typeface="Plus Jakarta Sans"/>
+              </a:rPr>
+              <a:t>Prompts include knowledge-base context, audience, language, tone, and content strategy</a:t>
+            </a:r>
+            <a:endParaRPr sz="1350">
+              <a:solidFill>
+                <a:srgbClr val="475569"/>
+              </a:solidFill>
+              <a:latin typeface="Plus Jakarta Sans"/>
+              <a:ea typeface="Plus Jakarta Sans"/>
+              <a:cs typeface="Plus Jakarta Sans"/>
+              <a:sym typeface="Plus Jakarta Sans"/>
+            </a:endParaRPr>
+          </a:p>
+          <a:p>
+            <a:pPr indent="-314325" lvl="0" marL="457200" marR="0" rtl="0" algn="l">
+              <a:spcBef>
+                <a:spcPts val="0"/>
+              </a:spcBef>
+              <a:spcAft>
+                <a:spcPts val="0"/>
+              </a:spcAft>
+              <a:buClr>
+                <a:srgbClr val="475569"/>
+              </a:buClr>
+              <a:buSzPts val="1350"/>
+              <a:buFont typeface="Plus Jakarta Sans"/>
+              <a:buChar char="●"/>
+            </a:pPr>
+            <a:r>
+              <a:rPr lang="en-US" sz="1350">
+                <a:solidFill>
+                  <a:srgbClr val="475569"/>
+                </a:solidFill>
+                <a:latin typeface="Plus Jakarta Sans"/>
+                <a:ea typeface="Plus Jakarta Sans"/>
+                <a:cs typeface="Plus Jakarta Sans"/>
+                <a:sym typeface="Plus Jakarta Sans"/>
+              </a:rPr>
+              <a:t>Channel-specific rules guide format and length</a:t>
+            </a:r>
+            <a:endParaRPr sz="1350">
+              <a:solidFill>
+                <a:srgbClr val="475569"/>
+              </a:solidFill>
+              <a:latin typeface="Plus Jakarta Sans"/>
+              <a:ea typeface="Plus Jakarta Sans"/>
+              <a:cs typeface="Plus Jakarta Sans"/>
+              <a:sym typeface="Plus Jakarta Sans"/>
+            </a:endParaRPr>
+          </a:p>
+          <a:p>
+            <a:pPr indent="-314325" lvl="0" marL="457200" marR="0" rtl="0" algn="l">
+              <a:spcBef>
+                <a:spcPts val="0"/>
+              </a:spcBef>
+              <a:spcAft>
+                <a:spcPts val="0"/>
+              </a:spcAft>
+              <a:buClr>
+                <a:srgbClr val="475569"/>
+              </a:buClr>
+              <a:buSzPts val="1350"/>
+              <a:buFont typeface="Plus Jakarta Sans"/>
+              <a:buChar char="●"/>
+            </a:pPr>
+            <a:r>
+              <a:rPr lang="en-US" sz="1350">
+                <a:solidFill>
+                  <a:srgbClr val="475569"/>
+                </a:solidFill>
+                <a:latin typeface="Plus Jakarta Sans"/>
+                <a:ea typeface="Plus Jakarta Sans"/>
+                <a:cs typeface="Plus Jakarta Sans"/>
+                <a:sym typeface="Plus Jakarta Sans"/>
+              </a:rPr>
+              <a:t>Accuracy rules require supported AMBOSS facts and prohibit unsupported medical claims</a:t>
+            </a:r>
+            <a:endParaRPr sz="1350">
+              <a:solidFill>
+                <a:srgbClr val="475569"/>
+              </a:solidFill>
+              <a:latin typeface="Plus Jakarta Sans"/>
+              <a:ea typeface="Plus Jakarta Sans"/>
+              <a:cs typeface="Plus Jakarta Sans"/>
+              <a:sym typeface="Plus Jakarta Sans"/>
+            </a:endParaRPr>
+          </a:p>
+          <a:p>
+            <a:pPr indent="-314325" lvl="0" marL="457200" marR="0" rtl="0" algn="l">
+              <a:spcBef>
+                <a:spcPts val="0"/>
+              </a:spcBef>
+              <a:spcAft>
+                <a:spcPts val="0"/>
+              </a:spcAft>
+              <a:buClr>
+                <a:srgbClr val="475569"/>
+              </a:buClr>
+              <a:buSzPts val="1350"/>
+              <a:buFont typeface="Plus Jakarta Sans"/>
+              <a:buChar char="●"/>
+            </a:pPr>
+            <a:r>
+              <a:rPr lang="en-US" sz="1350">
+                <a:solidFill>
+                  <a:srgbClr val="475569"/>
+                </a:solidFill>
+                <a:latin typeface="Plus Jakarta Sans"/>
+                <a:ea typeface="Plus Jakarta Sans"/>
+                <a:cs typeface="Plus Jakarta Sans"/>
+                <a:sym typeface="Plus Jakarta Sans"/>
+              </a:rPr>
+              <a:t>Revision prompts apply reviewer feedback while preserving the original requirements</a:t>
+            </a:r>
+            <a:endParaRPr sz="1350">
+              <a:solidFill>
+                <a:srgbClr val="475569"/>
+              </a:solidFill>
+              <a:latin typeface="Plus Jakarta Sans"/>
+              <a:ea typeface="Plus Jakarta Sans"/>
+              <a:cs typeface="Plus Jakarta Sans"/>
+              <a:sym typeface="Plus Jakarta Sans"/>
+            </a:endParaRPr>
+          </a:p>
+        </p:txBody>
+      </p:sp>
+      <p:sp>
+        <p:nvSpPr>
+          <p:cNvPr id="174" name="Google Shape;174;h1d6895f2cb059417_2_0"/>
+          <p:cNvSpPr txBox="1"/>
+          <p:nvPr/>
+        </p:nvSpPr>
+        <p:spPr>
+          <a:xfrm>
+            <a:off x="8198586" y="3397502"/>
+            <a:ext cx="3332400" cy="2701500"/>
+          </a:xfrm>
+          <a:prstGeom prst="rect">
+            <a:avLst/>
+          </a:prstGeom>
+          <a:noFill/>
+          <a:ln>
+            <a:noFill/>
+          </a:ln>
+        </p:spPr>
+        <p:txBody>
+          <a:bodyPr anchorCtr="0" anchor="t" bIns="0" lIns="0" spcFirstLastPara="1" rIns="0" wrap="square" tIns="0">
+            <a:spAutoFit/>
+          </a:bodyPr>
+          <a:lstStyle/>
+          <a:p>
+            <a:pPr indent="-314325" lvl="0" marL="457200" rtl="0" algn="l">
+              <a:spcBef>
+                <a:spcPts val="0"/>
+              </a:spcBef>
+              <a:spcAft>
+                <a:spcPts val="0"/>
+              </a:spcAft>
+              <a:buClr>
+                <a:srgbClr val="475569"/>
+              </a:buClr>
+              <a:buSzPts val="1350"/>
+              <a:buFont typeface="Plus Jakarta Sans"/>
+              <a:buChar char="●"/>
+            </a:pPr>
+            <a:r>
+              <a:rPr b="1" lang="en-US" sz="1350">
+                <a:solidFill>
+                  <a:srgbClr val="475569"/>
+                </a:solidFill>
+                <a:latin typeface="Plus Jakarta Sans"/>
+                <a:ea typeface="Plus Jakarta Sans"/>
+                <a:cs typeface="Plus Jakarta Sans"/>
+                <a:sym typeface="Plus Jakarta Sans"/>
+              </a:rPr>
+              <a:t>Language</a:t>
+            </a:r>
+            <a:br>
+              <a:rPr lang="en-US" sz="1350">
+                <a:solidFill>
+                  <a:srgbClr val="475569"/>
+                </a:solidFill>
+                <a:latin typeface="Plus Jakarta Sans"/>
+                <a:ea typeface="Plus Jakarta Sans"/>
+                <a:cs typeface="Plus Jakarta Sans"/>
+                <a:sym typeface="Plus Jakarta Sans"/>
+              </a:rPr>
+            </a:br>
+            <a:r>
+              <a:rPr lang="en-US" sz="1350">
+                <a:solidFill>
+                  <a:srgbClr val="475569"/>
+                </a:solidFill>
+                <a:latin typeface="Plus Jakarta Sans"/>
+                <a:ea typeface="Plus Jakarta Sans"/>
+                <a:cs typeface="Plus Jakarta Sans"/>
+                <a:sym typeface="Plus Jakarta Sans"/>
+              </a:rPr>
+              <a:t>Python 3 (conda environment)</a:t>
+            </a:r>
+            <a:endParaRPr sz="1350">
+              <a:solidFill>
+                <a:srgbClr val="475569"/>
+              </a:solidFill>
+              <a:latin typeface="Plus Jakarta Sans"/>
+              <a:ea typeface="Plus Jakarta Sans"/>
+              <a:cs typeface="Plus Jakarta Sans"/>
+              <a:sym typeface="Plus Jakarta Sans"/>
+            </a:endParaRPr>
+          </a:p>
+          <a:p>
+            <a:pPr indent="-314325" lvl="0" marL="457200" rtl="0" algn="l">
+              <a:spcBef>
+                <a:spcPts val="0"/>
+              </a:spcBef>
+              <a:spcAft>
+                <a:spcPts val="0"/>
+              </a:spcAft>
+              <a:buClr>
+                <a:srgbClr val="475569"/>
+              </a:buClr>
+              <a:buSzPts val="1350"/>
+              <a:buFont typeface="Plus Jakarta Sans"/>
+              <a:buChar char="●"/>
+            </a:pPr>
+            <a:r>
+              <a:rPr b="1" lang="en-US" sz="1350">
+                <a:solidFill>
+                  <a:srgbClr val="475569"/>
+                </a:solidFill>
+                <a:latin typeface="Plus Jakarta Sans"/>
+                <a:ea typeface="Plus Jakarta Sans"/>
+                <a:cs typeface="Plus Jakarta Sans"/>
+                <a:sym typeface="Plus Jakarta Sans"/>
+              </a:rPr>
+              <a:t> LLM</a:t>
+            </a:r>
+            <a:br>
+              <a:rPr lang="en-US" sz="1350">
+                <a:solidFill>
+                  <a:srgbClr val="475569"/>
+                </a:solidFill>
+                <a:latin typeface="Plus Jakarta Sans"/>
+                <a:ea typeface="Plus Jakarta Sans"/>
+                <a:cs typeface="Plus Jakarta Sans"/>
+                <a:sym typeface="Plus Jakarta Sans"/>
+              </a:rPr>
+            </a:br>
+            <a:r>
+              <a:rPr lang="en-US" sz="1350">
+                <a:solidFill>
+                  <a:srgbClr val="475569"/>
+                </a:solidFill>
+                <a:latin typeface="Plus Jakarta Sans"/>
+                <a:ea typeface="Plus Jakarta Sans"/>
+                <a:cs typeface="Plus Jakarta Sans"/>
+                <a:sym typeface="Plus Jakarta Sans"/>
+              </a:rPr>
+              <a:t>OpenAI API, gpt-4o-mini</a:t>
+            </a:r>
+            <a:endParaRPr sz="1350">
+              <a:solidFill>
+                <a:srgbClr val="475569"/>
+              </a:solidFill>
+              <a:latin typeface="Plus Jakarta Sans"/>
+              <a:ea typeface="Plus Jakarta Sans"/>
+              <a:cs typeface="Plus Jakarta Sans"/>
+              <a:sym typeface="Plus Jakarta Sans"/>
+            </a:endParaRPr>
+          </a:p>
+          <a:p>
+            <a:pPr indent="-314325" lvl="0" marL="457200" rtl="0" algn="l">
+              <a:spcBef>
+                <a:spcPts val="0"/>
+              </a:spcBef>
+              <a:spcAft>
+                <a:spcPts val="0"/>
+              </a:spcAft>
+              <a:buClr>
+                <a:srgbClr val="475569"/>
+              </a:buClr>
+              <a:buSzPts val="1350"/>
+              <a:buFont typeface="Plus Jakarta Sans"/>
+              <a:buChar char="●"/>
+            </a:pPr>
+            <a:r>
+              <a:rPr lang="en-US" sz="1350">
+                <a:solidFill>
+                  <a:srgbClr val="475569"/>
+                </a:solidFill>
+                <a:latin typeface="Plus Jakarta Sans"/>
+                <a:ea typeface="Plus Jakarta Sans"/>
+                <a:cs typeface="Plus Jakarta Sans"/>
+                <a:sym typeface="Plus Jakarta Sans"/>
+              </a:rPr>
+              <a:t> </a:t>
+            </a:r>
+            <a:r>
+              <a:rPr b="1" lang="en-US" sz="1350">
+                <a:solidFill>
+                  <a:srgbClr val="475569"/>
+                </a:solidFill>
+                <a:latin typeface="Plus Jakarta Sans"/>
+                <a:ea typeface="Plus Jakarta Sans"/>
+                <a:cs typeface="Plus Jakarta Sans"/>
+                <a:sym typeface="Plus Jakarta Sans"/>
+              </a:rPr>
+              <a:t>Libraries</a:t>
+            </a:r>
+            <a:br>
+              <a:rPr lang="en-US" sz="1350">
+                <a:solidFill>
+                  <a:srgbClr val="475569"/>
+                </a:solidFill>
+                <a:latin typeface="Plus Jakarta Sans"/>
+                <a:ea typeface="Plus Jakarta Sans"/>
+                <a:cs typeface="Plus Jakarta Sans"/>
+                <a:sym typeface="Plus Jakarta Sans"/>
+              </a:rPr>
+            </a:br>
+            <a:r>
+              <a:rPr lang="en-US" sz="1350">
+                <a:solidFill>
+                  <a:srgbClr val="475569"/>
+                </a:solidFill>
+                <a:latin typeface="Plus Jakarta Sans"/>
+                <a:ea typeface="Plus Jakarta Sans"/>
+                <a:cs typeface="Plus Jakarta Sans"/>
+                <a:sym typeface="Plus Jakarta Sans"/>
+              </a:rPr>
+              <a:t>openai, python-dotenv</a:t>
+            </a:r>
+            <a:endParaRPr sz="1350">
+              <a:solidFill>
+                <a:srgbClr val="475569"/>
+              </a:solidFill>
+              <a:latin typeface="Plus Jakarta Sans"/>
+              <a:ea typeface="Plus Jakarta Sans"/>
+              <a:cs typeface="Plus Jakarta Sans"/>
+              <a:sym typeface="Plus Jakarta Sans"/>
+            </a:endParaRPr>
+          </a:p>
+          <a:p>
+            <a:pPr indent="-314325" lvl="0" marL="457200" rtl="0" algn="l">
+              <a:spcBef>
+                <a:spcPts val="0"/>
+              </a:spcBef>
+              <a:spcAft>
+                <a:spcPts val="0"/>
+              </a:spcAft>
+              <a:buClr>
+                <a:srgbClr val="475569"/>
+              </a:buClr>
+              <a:buSzPts val="1350"/>
+              <a:buFont typeface="Plus Jakarta Sans"/>
+              <a:buChar char="●"/>
+            </a:pPr>
+            <a:r>
+              <a:rPr b="1" lang="en-US" sz="1350">
+                <a:solidFill>
+                  <a:srgbClr val="475569"/>
+                </a:solidFill>
+                <a:latin typeface="Plus Jakarta Sans"/>
+                <a:ea typeface="Plus Jakarta Sans"/>
+                <a:cs typeface="Plus Jakarta Sans"/>
+                <a:sym typeface="Plus Jakarta Sans"/>
+              </a:rPr>
+              <a:t>Knowledge base</a:t>
+            </a:r>
+            <a:br>
+              <a:rPr lang="en-US" sz="1350">
+                <a:solidFill>
+                  <a:srgbClr val="475569"/>
+                </a:solidFill>
+                <a:latin typeface="Plus Jakarta Sans"/>
+                <a:ea typeface="Plus Jakarta Sans"/>
+                <a:cs typeface="Plus Jakarta Sans"/>
+                <a:sym typeface="Plus Jakarta Sans"/>
+              </a:rPr>
+            </a:br>
+            <a:r>
+              <a:rPr lang="en-US" sz="1350">
+                <a:solidFill>
+                  <a:srgbClr val="475569"/>
+                </a:solidFill>
+                <a:latin typeface="Plus Jakarta Sans"/>
+                <a:ea typeface="Plus Jakarta Sans"/>
+                <a:cs typeface="Plus Jakarta Sans"/>
+                <a:sym typeface="Plus Jakarta Sans"/>
+              </a:rPr>
+              <a:t>Markdown files </a:t>
+            </a:r>
+            <a:endParaRPr sz="1350">
+              <a:solidFill>
+                <a:srgbClr val="475569"/>
+              </a:solidFill>
+              <a:latin typeface="Plus Jakarta Sans"/>
+              <a:ea typeface="Plus Jakarta Sans"/>
+              <a:cs typeface="Plus Jakarta Sans"/>
+              <a:sym typeface="Plus Jakarta Sans"/>
+            </a:endParaRPr>
+          </a:p>
+          <a:p>
+            <a:pPr indent="-314325" lvl="0" marL="457200" rtl="0" algn="l">
+              <a:spcBef>
+                <a:spcPts val="0"/>
+              </a:spcBef>
+              <a:spcAft>
+                <a:spcPts val="0"/>
+              </a:spcAft>
+              <a:buClr>
+                <a:srgbClr val="475569"/>
+              </a:buClr>
+              <a:buSzPts val="1350"/>
+              <a:buFont typeface="Plus Jakarta Sans"/>
+              <a:buChar char="●"/>
+            </a:pPr>
+            <a:r>
+              <a:rPr b="1" lang="en-US" sz="1350">
+                <a:solidFill>
+                  <a:srgbClr val="475569"/>
+                </a:solidFill>
+                <a:latin typeface="Plus Jakarta Sans"/>
+                <a:ea typeface="Plus Jakarta Sans"/>
+                <a:cs typeface="Plus Jakarta Sans"/>
+                <a:sym typeface="Plus Jakarta Sans"/>
+              </a:rPr>
+              <a:t>Interface</a:t>
+            </a:r>
+            <a:br>
+              <a:rPr lang="en-US" sz="1350">
+                <a:solidFill>
+                  <a:srgbClr val="475569"/>
+                </a:solidFill>
+                <a:latin typeface="Plus Jakarta Sans"/>
+                <a:ea typeface="Plus Jakarta Sans"/>
+                <a:cs typeface="Plus Jakarta Sans"/>
+                <a:sym typeface="Plus Jakarta Sans"/>
+              </a:rPr>
+            </a:br>
+            <a:r>
+              <a:rPr lang="en-US" sz="1350">
+                <a:solidFill>
+                  <a:srgbClr val="475569"/>
+                </a:solidFill>
+                <a:latin typeface="Plus Jakarta Sans"/>
+                <a:ea typeface="Plus Jakarta Sans"/>
+                <a:cs typeface="Plus Jakarta Sans"/>
+                <a:sym typeface="Plus Jakarta Sans"/>
+              </a:rPr>
+              <a:t>Terminal (python -m src.main)</a:t>
+            </a:r>
+            <a:endParaRPr sz="1350">
+              <a:solidFill>
+                <a:srgbClr val="475569"/>
+              </a:solidFill>
+              <a:latin typeface="Plus Jakarta Sans"/>
+              <a:ea typeface="Plus Jakarta Sans"/>
+              <a:cs typeface="Plus Jakarta Sans"/>
+              <a:sym typeface="Plus Jakarta Sans"/>
+            </a:endParaRPr>
+          </a:p>
+          <a:p>
+            <a:pPr indent="-314325" lvl="0" marL="457200" marR="0" rtl="0" algn="l">
+              <a:spcBef>
+                <a:spcPts val="0"/>
+              </a:spcBef>
+              <a:spcAft>
+                <a:spcPts val="0"/>
+              </a:spcAft>
+              <a:buClr>
+                <a:srgbClr val="475569"/>
+              </a:buClr>
+              <a:buSzPts val="1350"/>
+              <a:buFont typeface="Plus Jakarta Sans"/>
+              <a:buChar char="●"/>
+            </a:pPr>
+            <a:r>
+              <a:rPr b="1" lang="en-US" sz="1350">
+                <a:solidFill>
+                  <a:srgbClr val="475569"/>
+                </a:solidFill>
+                <a:latin typeface="Plus Jakarta Sans"/>
+                <a:ea typeface="Plus Jakarta Sans"/>
+                <a:cs typeface="Plus Jakarta Sans"/>
+                <a:sym typeface="Plus Jakarta Sans"/>
+              </a:rPr>
+              <a:t>Teamwork</a:t>
+            </a:r>
+            <a:br>
+              <a:rPr lang="en-US" sz="1350">
+                <a:solidFill>
+                  <a:srgbClr val="475569"/>
+                </a:solidFill>
+                <a:latin typeface="Plus Jakarta Sans"/>
+                <a:ea typeface="Plus Jakarta Sans"/>
+                <a:cs typeface="Plus Jakarta Sans"/>
+                <a:sym typeface="Plus Jakarta Sans"/>
+              </a:rPr>
+            </a:br>
+            <a:r>
+              <a:rPr lang="en-US" sz="1350">
+                <a:solidFill>
+                  <a:srgbClr val="475569"/>
+                </a:solidFill>
+                <a:latin typeface="Plus Jakarta Sans"/>
+                <a:ea typeface="Plus Jakarta Sans"/>
+                <a:cs typeface="Plus Jakarta Sans"/>
+                <a:sym typeface="Plus Jakarta Sans"/>
+              </a:rPr>
+              <a:t>Git + GitHub, Trello (Kanban), agents.md for AI coding agents </a:t>
+            </a:r>
+            <a:endParaRPr sz="1350">
+              <a:solidFill>
+                <a:srgbClr val="475569"/>
+              </a:solidFill>
+              <a:latin typeface="Plus Jakarta Sans"/>
+              <a:ea typeface="Plus Jakarta Sans"/>
+              <a:cs typeface="Plus Jakarta Sans"/>
+              <a:sym typeface="Plus Jakarta Sans"/>
+            </a:endParaRPr>
+          </a:p>
+        </p:txBody>
+      </p:sp>
+    </p:spTree>
+  </p:cSld>
+  <p:clrMapOvr>
+    <a:masterClrMapping/>
+  </p:clrMapOvr>
+</p:sld>
+</file>
+
+<file path=ppt/slides/slide7.xml><?xml version="1.0" encoding="utf-8"?>
+<p:sld xmlns:a="http://schemas.openxmlformats.org/drawingml/2006/main" xmlns:r="http://schemas.openxmlformats.org/officeDocument/2006/relationships" xmlns:mc="http://schemas.openxmlformats.org/markup-compatibility/2006" xmlns:mv="urn:schemas-microsoft-com:mac:vml" xmlns:p="http://schemas.openxmlformats.org/presentationml/2006/main" xmlns:c="http://schemas.openxmlformats.org/drawingml/2006/chart" xmlns:dgm="http://schemas.openxmlformats.org/drawingml/2006/diagram" xmlns:o="urn:schemas-microsoft-com:office:office" xmlns:v="urn:schemas-microsoft-com:vml" xmlns:pvml="urn:schemas-microsoft-com:office:powerpoint" xmlns:com="http://schemas.openxmlformats.org/drawingml/2006/compatibility" xmlns:p14="http://schemas.microsoft.com/office/powerpoint/2010/main" xmlns:p15="http://schemas.microsoft.com/office/powerpoint/2012/main" xmlns:ahyp="http://schemas.microsoft.com/office/drawing/2018/hyperlinkcolor">
+  <p:cSld>
     <p:bg>
       <p:bgPr>
         <a:solidFill>
@@ -16489,7 +18929,7 @@
     </p:bg>
     <p:spTree>
       <p:nvGrpSpPr>
-        <p:cNvPr id="155" name="Shape 155"/>
+        <p:cNvPr id="178" name="Shape 178"/>
         <p:cNvGrpSpPr/>
         <p:nvPr/>
       </p:nvGrpSpPr>
@@ -16503,7 +18943,7 @@
       </p:grpSpPr>
       <p:sp>
         <p:nvSpPr>
-          <p:cNvPr id="156" name="Google Shape;156;p6"/>
+          <p:cNvPr id="179" name="Google Shape;179;p6"/>
           <p:cNvSpPr txBox="1"/>
           <p:nvPr/>
         </p:nvSpPr>
@@ -16557,7 +18997,7 @@
       </p:sp>
       <p:sp>
         <p:nvSpPr>
-          <p:cNvPr id="157" name="Google Shape;157;p6"/>
+          <p:cNvPr id="180" name="Google Shape;180;p6"/>
           <p:cNvSpPr txBox="1"/>
           <p:nvPr/>
         </p:nvSpPr>
@@ -16607,7 +19047,7 @@
       </p:sp>
       <p:pic>
         <p:nvPicPr>
-          <p:cNvPr id="158" name="Google Shape;158;p6"/>
+          <p:cNvPr id="181" name="Google Shape;181;p6"/>
           <p:cNvPicPr preferRelativeResize="0"/>
           <p:nvPr/>
         </p:nvPicPr>
@@ -16641,12 +19081,12 @@
 </p:sld>
 </file>
 
-<file path=ppt/slides/slide7.xml><?xml version="1.0" encoding="utf-8"?>
+<file path=ppt/slides/slide8.xml><?xml version="1.0" encoding="utf-8"?>
 <p:sld xmlns:a="http://schemas.openxmlformats.org/drawingml/2006/main" xmlns:r="http://schemas.openxmlformats.org/officeDocument/2006/relationships" xmlns:mc="http://schemas.openxmlformats.org/markup-compatibility/2006" xmlns:mv="urn:schemas-microsoft-com:mac:vml" xmlns:p="http://schemas.openxmlformats.org/presentationml/2006/main" xmlns:c="http://schemas.openxmlformats.org/drawingml/2006/chart" xmlns:dgm="http://schemas.openxmlformats.org/drawingml/2006/diagram" xmlns:o="urn:schemas-microsoft-com:office:office" xmlns:v="urn:schemas-microsoft-com:vml" xmlns:pvml="urn:schemas-microsoft-com:office:powerpoint" xmlns:com="http://schemas.openxmlformats.org/drawingml/2006/compatibility" xmlns:p14="http://schemas.microsoft.com/office/powerpoint/2010/main" xmlns:p15="http://schemas.microsoft.com/office/powerpoint/2012/main" xmlns:ahyp="http://schemas.microsoft.com/office/drawing/2018/hyperlinkcolor">
   <p:cSld>
     <p:spTree>
       <p:nvGrpSpPr>
-        <p:cNvPr id="162" name="Shape 162"/>
+        <p:cNvPr id="185" name="Shape 185"/>
         <p:cNvGrpSpPr/>
         <p:nvPr/>
       </p:nvGrpSpPr>
@@ -16660,7 +19100,7 @@
       </p:grpSpPr>
       <p:pic>
         <p:nvPicPr>
-          <p:cNvPr id="163" name="Google Shape;163;h112f3c18fd02c57c_0_33" title="AMBOSS_Content_Creator_Demo.mp4">
+          <p:cNvPr id="186" name="Google Shape;186;h112f3c18fd02c57c_0_33" title="AMBOSS_Content_Creator_Demo.mp4">
             <a:hlinkClick r:id="rId3"/>
           </p:cNvPr>
           <p:cNvPicPr preferRelativeResize="0"/>
@@ -16696,7 +19136,7 @@
 </p:sld>
 </file>
 
-<file path=ppt/slides/slide8.xml><?xml version="1.0" encoding="utf-8"?>
+<file path=ppt/slides/slide9.xml><?xml version="1.0" encoding="utf-8"?>
 <p:sld xmlns:a="http://schemas.openxmlformats.org/drawingml/2006/main" xmlns:r="http://schemas.openxmlformats.org/officeDocument/2006/relationships" xmlns:mc="http://schemas.openxmlformats.org/markup-compatibility/2006" xmlns:mv="urn:schemas-microsoft-com:mac:vml" xmlns:p="http://schemas.openxmlformats.org/presentationml/2006/main" xmlns:c="http://schemas.openxmlformats.org/drawingml/2006/chart" xmlns:dgm="http://schemas.openxmlformats.org/drawingml/2006/diagram" xmlns:o="urn:schemas-microsoft-com:office:office" xmlns:v="urn:schemas-microsoft-com:vml" xmlns:pvml="urn:schemas-microsoft-com:office:powerpoint" xmlns:com="http://schemas.openxmlformats.org/drawingml/2006/compatibility" xmlns:p14="http://schemas.microsoft.com/office/powerpoint/2010/main" xmlns:p15="http://schemas.microsoft.com/office/powerpoint/2012/main" xmlns:ahyp="http://schemas.microsoft.com/office/drawing/2018/hyperlinkcolor">
   <p:cSld>
     <p:bg>
@@ -16708,7 +19148,7 @@
     </p:bg>
     <p:spTree>
       <p:nvGrpSpPr>
-        <p:cNvPr id="167" name="Shape 167"/>
+        <p:cNvPr id="190" name="Shape 190"/>
         <p:cNvGrpSpPr/>
         <p:nvPr/>
       </p:nvGrpSpPr>
@@ -16722,7 +19162,7 @@
       </p:grpSpPr>
       <p:sp>
         <p:nvSpPr>
-          <p:cNvPr id="168" name="Google Shape;168;h112f3c18fd02c57c_0_3"/>
+          <p:cNvPr id="191" name="Google Shape;191;h112f3c18fd02c57c_0_3"/>
           <p:cNvSpPr txBox="1"/>
           <p:nvPr/>
         </p:nvSpPr>
@@ -16776,7 +19216,7 @@
       </p:sp>
       <p:sp>
         <p:nvSpPr>
-          <p:cNvPr id="169" name="Google Shape;169;h112f3c18fd02c57c_0_3"/>
+          <p:cNvPr id="192" name="Google Shape;192;h112f3c18fd02c57c_0_3"/>
           <p:cNvSpPr txBox="1"/>
           <p:nvPr/>
         </p:nvSpPr>
@@ -16830,7 +19270,7 @@
       </p:sp>
       <p:pic>
         <p:nvPicPr>
-          <p:cNvPr id="170" name="Google Shape;170;h112f3c18fd02c57c_0_3"/>
+          <p:cNvPr id="193" name="Google Shape;193;h112f3c18fd02c57c_0_3"/>
           <p:cNvPicPr preferRelativeResize="0"/>
           <p:nvPr/>
         </p:nvPicPr>
@@ -16858,7 +19298,7 @@
       </p:pic>
       <p:pic>
         <p:nvPicPr>
-          <p:cNvPr id="171" name="Google Shape;171;h112f3c18fd02c57c_0_3"/>
+          <p:cNvPr id="194" name="Google Shape;194;h112f3c18fd02c57c_0_3"/>
           <p:cNvPicPr preferRelativeResize="0"/>
           <p:nvPr/>
         </p:nvPicPr>
@@ -16884,914 +19324,6 @@
           </a:ln>
         </p:spPr>
       </p:pic>
-    </p:spTree>
-  </p:cSld>
-  <p:clrMapOvr>
-    <a:masterClrMapping/>
-  </p:clrMapOvr>
-</p:sld>
-</file>
-
-<file path=ppt/slides/slide9.xml><?xml version="1.0" encoding="utf-8"?>
-<p:sld xmlns:a="http://schemas.openxmlformats.org/drawingml/2006/main" xmlns:r="http://schemas.openxmlformats.org/officeDocument/2006/relationships" xmlns:mc="http://schemas.openxmlformats.org/markup-compatibility/2006" xmlns:mv="urn:schemas-microsoft-com:mac:vml" xmlns:p="http://schemas.openxmlformats.org/presentationml/2006/main" xmlns:c="http://schemas.openxmlformats.org/drawingml/2006/chart" xmlns:dgm="http://schemas.openxmlformats.org/drawingml/2006/diagram" xmlns:o="urn:schemas-microsoft-com:office:office" xmlns:v="urn:schemas-microsoft-com:vml" xmlns:pvml="urn:schemas-microsoft-com:office:powerpoint" xmlns:com="http://schemas.openxmlformats.org/drawingml/2006/compatibility" xmlns:p14="http://schemas.microsoft.com/office/powerpoint/2010/main" xmlns:p15="http://schemas.microsoft.com/office/powerpoint/2012/main" xmlns:ahyp="http://schemas.microsoft.com/office/drawing/2018/hyperlinkcolor">
-  <p:cSld>
-    <p:bg>
-      <p:bgPr>
-        <a:solidFill>
-          <a:srgbClr val="F8FAFC"/>
-        </a:solidFill>
-      </p:bgPr>
-    </p:bg>
-    <p:spTree>
-      <p:nvGrpSpPr>
-        <p:cNvPr id="175" name="Shape 175"/>
-        <p:cNvGrpSpPr/>
-        <p:nvPr/>
-      </p:nvGrpSpPr>
-      <p:grpSpPr>
-        <a:xfrm>
-          <a:off x="0" y="0"/>
-          <a:ext cx="0" cy="0"/>
-          <a:chOff x="0" y="0"/>
-          <a:chExt cx="0" cy="0"/>
-        </a:xfrm>
-      </p:grpSpPr>
-      <p:sp>
-        <p:nvSpPr>
-          <p:cNvPr id="176" name="Google Shape;176;p9"/>
-          <p:cNvSpPr/>
-          <p:nvPr/>
-        </p:nvSpPr>
-        <p:spPr>
-          <a:xfrm>
-            <a:off x="1333500" y="2143125"/>
-            <a:ext cx="4457700" cy="19050"/>
-          </a:xfrm>
-          <a:prstGeom prst="rect">
-            <a:avLst/>
-          </a:prstGeom>
-          <a:solidFill>
-            <a:srgbClr val="EF4444"/>
-          </a:solidFill>
-          <a:ln>
-            <a:noFill/>
-          </a:ln>
-        </p:spPr>
-        <p:txBody>
-          <a:bodyPr anchorCtr="0" anchor="ctr" bIns="45700" lIns="91425" spcFirstLastPara="1" rIns="91425" wrap="square" tIns="45700">
-            <a:noAutofit/>
-          </a:bodyPr>
-          <a:lstStyle/>
-          <a:p>
-            <a:pPr indent="0" lvl="0" marL="0" marR="0" rtl="0" algn="ctr">
-              <a:spcBef>
-                <a:spcPts val="0"/>
-              </a:spcBef>
-              <a:spcAft>
-                <a:spcPts val="0"/>
-              </a:spcAft>
-              <a:buNone/>
-            </a:pPr>
-            <a:r>
-              <a:t/>
-            </a:r>
-            <a:endParaRPr b="0" i="0" sz="1800" u="none" cap="none" strike="noStrike">
-              <a:solidFill>
-                <a:schemeClr val="dk1"/>
-              </a:solidFill>
-              <a:latin typeface="Calibri"/>
-              <a:ea typeface="Calibri"/>
-              <a:cs typeface="Calibri"/>
-              <a:sym typeface="Calibri"/>
-            </a:endParaRPr>
-          </a:p>
-        </p:txBody>
-      </p:sp>
-      <p:sp>
-        <p:nvSpPr>
-          <p:cNvPr id="177" name="Google Shape;177;p9"/>
-          <p:cNvSpPr/>
-          <p:nvPr/>
-        </p:nvSpPr>
-        <p:spPr>
-          <a:xfrm>
-            <a:off x="6400800" y="2143125"/>
-            <a:ext cx="4457700" cy="19050"/>
-          </a:xfrm>
-          <a:prstGeom prst="rect">
-            <a:avLst/>
-          </a:prstGeom>
-          <a:solidFill>
-            <a:srgbClr val="6DACBE"/>
-          </a:solidFill>
-          <a:ln>
-            <a:noFill/>
-          </a:ln>
-        </p:spPr>
-        <p:txBody>
-          <a:bodyPr anchorCtr="0" anchor="ctr" bIns="45700" lIns="91425" spcFirstLastPara="1" rIns="91425" wrap="square" tIns="45700">
-            <a:noAutofit/>
-          </a:bodyPr>
-          <a:lstStyle/>
-          <a:p>
-            <a:pPr indent="0" lvl="0" marL="0" marR="0" rtl="0" algn="ctr">
-              <a:spcBef>
-                <a:spcPts val="0"/>
-              </a:spcBef>
-              <a:spcAft>
-                <a:spcPts val="0"/>
-              </a:spcAft>
-              <a:buNone/>
-            </a:pPr>
-            <a:r>
-              <a:t/>
-            </a:r>
-            <a:endParaRPr b="0" i="0" sz="1800" u="none" cap="none" strike="noStrike">
-              <a:solidFill>
-                <a:schemeClr val="dk1"/>
-              </a:solidFill>
-              <a:latin typeface="Calibri"/>
-              <a:ea typeface="Calibri"/>
-              <a:cs typeface="Calibri"/>
-              <a:sym typeface="Calibri"/>
-            </a:endParaRPr>
-          </a:p>
-        </p:txBody>
-      </p:sp>
-      <p:sp>
-        <p:nvSpPr>
-          <p:cNvPr id="178" name="Google Shape;178;p9"/>
-          <p:cNvSpPr txBox="1"/>
-          <p:nvPr/>
-        </p:nvSpPr>
-        <p:spPr>
-          <a:xfrm>
-            <a:off x="-381000" y="652725"/>
-            <a:ext cx="12954000" cy="461700"/>
-          </a:xfrm>
-          <a:prstGeom prst="rect">
-            <a:avLst/>
-          </a:prstGeom>
-          <a:noFill/>
-          <a:ln>
-            <a:noFill/>
-          </a:ln>
-        </p:spPr>
-        <p:txBody>
-          <a:bodyPr anchorCtr="0" anchor="t" bIns="0" lIns="0" spcFirstLastPara="1" rIns="0" wrap="square" tIns="0">
-            <a:spAutoFit/>
-          </a:bodyPr>
-          <a:lstStyle/>
-          <a:p>
-            <a:pPr indent="0" lvl="0" marL="0" marR="0" rtl="0" algn="ctr">
-              <a:spcBef>
-                <a:spcPts val="0"/>
-              </a:spcBef>
-              <a:spcAft>
-                <a:spcPts val="0"/>
-              </a:spcAft>
-              <a:buNone/>
-            </a:pPr>
-            <a:r>
-              <a:rPr b="1" lang="en-US" sz="3000">
-                <a:solidFill>
-                  <a:srgbClr val="0F172A"/>
-                </a:solidFill>
-                <a:latin typeface="Plus Jakarta Sans"/>
-                <a:ea typeface="Plus Jakarta Sans"/>
-                <a:cs typeface="Plus Jakarta Sans"/>
-                <a:sym typeface="Plus Jakarta Sans"/>
-              </a:rPr>
-              <a:t>Challenges faced &amp; solutions</a:t>
-            </a:r>
-            <a:endParaRPr/>
-          </a:p>
-        </p:txBody>
-      </p:sp>
-      <p:sp>
-        <p:nvSpPr>
-          <p:cNvPr id="179" name="Google Shape;179;p9"/>
-          <p:cNvSpPr txBox="1"/>
-          <p:nvPr/>
-        </p:nvSpPr>
-        <p:spPr>
-          <a:xfrm>
-            <a:off x="1333500" y="1704975"/>
-            <a:ext cx="4553100" cy="277200"/>
-          </a:xfrm>
-          <a:prstGeom prst="rect">
-            <a:avLst/>
-          </a:prstGeom>
-          <a:noFill/>
-          <a:ln>
-            <a:noFill/>
-          </a:ln>
-        </p:spPr>
-        <p:txBody>
-          <a:bodyPr anchorCtr="0" anchor="t" bIns="0" lIns="0" spcFirstLastPara="1" rIns="0" wrap="square" tIns="0">
-            <a:spAutoFit/>
-          </a:bodyPr>
-          <a:lstStyle/>
-          <a:p>
-            <a:pPr indent="0" lvl="0" marL="0" marR="0" rtl="0" algn="l">
-              <a:spcBef>
-                <a:spcPts val="0"/>
-              </a:spcBef>
-              <a:spcAft>
-                <a:spcPts val="0"/>
-              </a:spcAft>
-              <a:buNone/>
-            </a:pPr>
-            <a:r>
-              <a:rPr b="1" i="0" lang="en-US" sz="1800" u="none" cap="none" strike="noStrike">
-                <a:solidFill>
-                  <a:srgbClr val="EF4444"/>
-                </a:solidFill>
-                <a:latin typeface="Plus Jakarta Sans"/>
-                <a:ea typeface="Plus Jakarta Sans"/>
-                <a:cs typeface="Plus Jakarta Sans"/>
-                <a:sym typeface="Plus Jakarta Sans"/>
-              </a:rPr>
-              <a:t>Challenges </a:t>
-            </a:r>
-            <a:endParaRPr/>
-          </a:p>
-        </p:txBody>
-      </p:sp>
-      <p:sp>
-        <p:nvSpPr>
-          <p:cNvPr id="180" name="Google Shape;180;p9"/>
-          <p:cNvSpPr txBox="1"/>
-          <p:nvPr/>
-        </p:nvSpPr>
-        <p:spPr>
-          <a:xfrm>
-            <a:off x="6400800" y="1704975"/>
-            <a:ext cx="4553100" cy="277200"/>
-          </a:xfrm>
-          <a:prstGeom prst="rect">
-            <a:avLst/>
-          </a:prstGeom>
-          <a:noFill/>
-          <a:ln>
-            <a:noFill/>
-          </a:ln>
-        </p:spPr>
-        <p:txBody>
-          <a:bodyPr anchorCtr="0" anchor="t" bIns="0" lIns="0" spcFirstLastPara="1" rIns="0" wrap="square" tIns="0">
-            <a:spAutoFit/>
-          </a:bodyPr>
-          <a:lstStyle/>
-          <a:p>
-            <a:pPr indent="0" lvl="0" marL="0" marR="0" rtl="0" algn="l">
-              <a:spcBef>
-                <a:spcPts val="0"/>
-              </a:spcBef>
-              <a:spcAft>
-                <a:spcPts val="0"/>
-              </a:spcAft>
-              <a:buNone/>
-            </a:pPr>
-            <a:r>
-              <a:rPr b="1" i="0" lang="en-US" sz="1800" u="none" cap="none" strike="noStrike">
-                <a:solidFill>
-                  <a:srgbClr val="0F172A"/>
-                </a:solidFill>
-                <a:latin typeface="Plus Jakarta Sans"/>
-                <a:ea typeface="Plus Jakarta Sans"/>
-                <a:cs typeface="Plus Jakarta Sans"/>
-                <a:sym typeface="Plus Jakarta Sans"/>
-              </a:rPr>
-              <a:t>Solutions</a:t>
-            </a:r>
-            <a:endParaRPr/>
-          </a:p>
-        </p:txBody>
-      </p:sp>
-      <p:sp>
-        <p:nvSpPr>
-          <p:cNvPr id="181" name="Google Shape;181;p9"/>
-          <p:cNvSpPr txBox="1"/>
-          <p:nvPr/>
-        </p:nvSpPr>
-        <p:spPr>
-          <a:xfrm>
-            <a:off x="1333500" y="2466975"/>
-            <a:ext cx="5572200" cy="231000"/>
-          </a:xfrm>
-          <a:prstGeom prst="rect">
-            <a:avLst/>
-          </a:prstGeom>
-          <a:noFill/>
-          <a:ln>
-            <a:noFill/>
-          </a:ln>
-        </p:spPr>
-        <p:txBody>
-          <a:bodyPr anchorCtr="0" anchor="t" bIns="0" lIns="0" spcFirstLastPara="1" rIns="0" wrap="square" tIns="0">
-            <a:spAutoFit/>
-          </a:bodyPr>
-          <a:lstStyle/>
-          <a:p>
-            <a:pPr indent="0" lvl="0" marL="0" marR="0" rtl="0" algn="l">
-              <a:spcBef>
-                <a:spcPts val="0"/>
-              </a:spcBef>
-              <a:spcAft>
-                <a:spcPts val="0"/>
-              </a:spcAft>
-              <a:buNone/>
-            </a:pPr>
-            <a:r>
-              <a:rPr b="1" lang="en-US" sz="1500">
-                <a:solidFill>
-                  <a:srgbClr val="0F172A"/>
-                </a:solidFill>
-                <a:latin typeface="Plus Jakarta Sans"/>
-                <a:ea typeface="Plus Jakarta Sans"/>
-                <a:cs typeface="Plus Jakarta Sans"/>
-                <a:sym typeface="Plus Jakarta Sans"/>
-              </a:rPr>
-              <a:t>Github collab work</a:t>
-            </a:r>
-            <a:endParaRPr/>
-          </a:p>
-        </p:txBody>
-      </p:sp>
-      <p:sp>
-        <p:nvSpPr>
-          <p:cNvPr id="182" name="Google Shape;182;p9"/>
-          <p:cNvSpPr txBox="1"/>
-          <p:nvPr/>
-        </p:nvSpPr>
-        <p:spPr>
-          <a:xfrm>
-            <a:off x="1333500" y="2743200"/>
-            <a:ext cx="5572200" cy="207900"/>
-          </a:xfrm>
-          <a:prstGeom prst="rect">
-            <a:avLst/>
-          </a:prstGeom>
-          <a:noFill/>
-          <a:ln>
-            <a:noFill/>
-          </a:ln>
-        </p:spPr>
-        <p:txBody>
-          <a:bodyPr anchorCtr="0" anchor="t" bIns="0" lIns="0" spcFirstLastPara="1" rIns="0" wrap="square" tIns="0">
-            <a:spAutoFit/>
-          </a:bodyPr>
-          <a:lstStyle/>
-          <a:p>
-            <a:pPr indent="0" lvl="0" marL="0" marR="0" rtl="0" algn="l">
-              <a:spcBef>
-                <a:spcPts val="0"/>
-              </a:spcBef>
-              <a:spcAft>
-                <a:spcPts val="0"/>
-              </a:spcAft>
-              <a:buNone/>
-            </a:pPr>
-            <a:r>
-              <a:rPr lang="en-US" sz="1350">
-                <a:solidFill>
-                  <a:srgbClr val="475569"/>
-                </a:solidFill>
-                <a:latin typeface="Plus Jakarta Sans"/>
-                <a:ea typeface="Plus Jakarta Sans"/>
-                <a:cs typeface="Plus Jakarta Sans"/>
-                <a:sym typeface="Plus Jakarta Sans"/>
-              </a:rPr>
-              <a:t>Still a learning process</a:t>
-            </a:r>
-            <a:endParaRPr/>
-          </a:p>
-        </p:txBody>
-      </p:sp>
-      <p:sp>
-        <p:nvSpPr>
-          <p:cNvPr id="183" name="Google Shape;183;p9"/>
-          <p:cNvSpPr txBox="1"/>
-          <p:nvPr/>
-        </p:nvSpPr>
-        <p:spPr>
-          <a:xfrm>
-            <a:off x="1333500" y="3190875"/>
-            <a:ext cx="5572200" cy="231000"/>
-          </a:xfrm>
-          <a:prstGeom prst="rect">
-            <a:avLst/>
-          </a:prstGeom>
-          <a:noFill/>
-          <a:ln>
-            <a:noFill/>
-          </a:ln>
-        </p:spPr>
-        <p:txBody>
-          <a:bodyPr anchorCtr="0" anchor="t" bIns="0" lIns="0" spcFirstLastPara="1" rIns="0" wrap="square" tIns="0">
-            <a:spAutoFit/>
-          </a:bodyPr>
-          <a:lstStyle/>
-          <a:p>
-            <a:pPr indent="0" lvl="0" marL="0" marR="0" rtl="0" algn="l">
-              <a:spcBef>
-                <a:spcPts val="0"/>
-              </a:spcBef>
-              <a:spcAft>
-                <a:spcPts val="0"/>
-              </a:spcAft>
-              <a:buNone/>
-            </a:pPr>
-            <a:r>
-              <a:rPr b="1" lang="en-US" sz="1500">
-                <a:solidFill>
-                  <a:srgbClr val="0F172A"/>
-                </a:solidFill>
-                <a:latin typeface="Plus Jakarta Sans"/>
-                <a:ea typeface="Plus Jakarta Sans"/>
-                <a:cs typeface="Plus Jakarta Sans"/>
-                <a:sym typeface="Plus Jakarta Sans"/>
-              </a:rPr>
-              <a:t>How to share the work</a:t>
-            </a:r>
-            <a:endParaRPr/>
-          </a:p>
-        </p:txBody>
-      </p:sp>
-      <p:sp>
-        <p:nvSpPr>
-          <p:cNvPr id="184" name="Google Shape;184;p9"/>
-          <p:cNvSpPr txBox="1"/>
-          <p:nvPr/>
-        </p:nvSpPr>
-        <p:spPr>
-          <a:xfrm>
-            <a:off x="1333500" y="3467100"/>
-            <a:ext cx="4457700" cy="415500"/>
-          </a:xfrm>
-          <a:prstGeom prst="rect">
-            <a:avLst/>
-          </a:prstGeom>
-          <a:noFill/>
-          <a:ln>
-            <a:noFill/>
-          </a:ln>
-        </p:spPr>
-        <p:txBody>
-          <a:bodyPr anchorCtr="0" anchor="t" bIns="0" lIns="0" spcFirstLastPara="1" rIns="0" wrap="square" tIns="0">
-            <a:spAutoFit/>
-          </a:bodyPr>
-          <a:lstStyle/>
-          <a:p>
-            <a:pPr indent="0" lvl="0" marL="0" marR="0" rtl="0" algn="l">
-              <a:spcBef>
-                <a:spcPts val="0"/>
-              </a:spcBef>
-              <a:spcAft>
-                <a:spcPts val="0"/>
-              </a:spcAft>
-              <a:buNone/>
-            </a:pPr>
-            <a:r>
-              <a:rPr lang="en-US" sz="1350">
-                <a:solidFill>
-                  <a:srgbClr val="475569"/>
-                </a:solidFill>
-                <a:latin typeface="Plus Jakarta Sans"/>
-                <a:ea typeface="Plus Jakarta Sans"/>
-                <a:cs typeface="Plus Jakarta Sans"/>
-                <a:sym typeface="Plus Jakarta Sans"/>
-              </a:rPr>
-              <a:t>Due to the project size, workload division can be challenging</a:t>
-            </a:r>
-            <a:endParaRPr/>
-          </a:p>
-        </p:txBody>
-      </p:sp>
-      <p:sp>
-        <p:nvSpPr>
-          <p:cNvPr id="185" name="Google Shape;185;p9"/>
-          <p:cNvSpPr txBox="1"/>
-          <p:nvPr/>
-        </p:nvSpPr>
-        <p:spPr>
-          <a:xfrm>
-            <a:off x="6400800" y="2466975"/>
-            <a:ext cx="5572200" cy="231000"/>
-          </a:xfrm>
-          <a:prstGeom prst="rect">
-            <a:avLst/>
-          </a:prstGeom>
-          <a:noFill/>
-          <a:ln>
-            <a:noFill/>
-          </a:ln>
-        </p:spPr>
-        <p:txBody>
-          <a:bodyPr anchorCtr="0" anchor="t" bIns="0" lIns="0" spcFirstLastPara="1" rIns="0" wrap="square" tIns="0">
-            <a:spAutoFit/>
-          </a:bodyPr>
-          <a:lstStyle/>
-          <a:p>
-            <a:pPr indent="0" lvl="0" marL="0" marR="0" rtl="0" algn="l">
-              <a:spcBef>
-                <a:spcPts val="0"/>
-              </a:spcBef>
-              <a:spcAft>
-                <a:spcPts val="0"/>
-              </a:spcAft>
-              <a:buNone/>
-            </a:pPr>
-            <a:r>
-              <a:rPr b="1" lang="en-US" sz="1500">
-                <a:solidFill>
-                  <a:srgbClr val="0F172A"/>
-                </a:solidFill>
-                <a:latin typeface="Plus Jakarta Sans"/>
-                <a:ea typeface="Plus Jakarta Sans"/>
-                <a:cs typeface="Plus Jakarta Sans"/>
-                <a:sym typeface="Plus Jakarta Sans"/>
-              </a:rPr>
-              <a:t>GenAI support</a:t>
-            </a:r>
-            <a:endParaRPr/>
-          </a:p>
-        </p:txBody>
-      </p:sp>
-      <p:sp>
-        <p:nvSpPr>
-          <p:cNvPr id="186" name="Google Shape;186;p9"/>
-          <p:cNvSpPr txBox="1"/>
-          <p:nvPr/>
-        </p:nvSpPr>
-        <p:spPr>
-          <a:xfrm>
-            <a:off x="6400800" y="2743200"/>
-            <a:ext cx="5572200" cy="207900"/>
-          </a:xfrm>
-          <a:prstGeom prst="rect">
-            <a:avLst/>
-          </a:prstGeom>
-          <a:noFill/>
-          <a:ln>
-            <a:noFill/>
-          </a:ln>
-        </p:spPr>
-        <p:txBody>
-          <a:bodyPr anchorCtr="0" anchor="t" bIns="0" lIns="0" spcFirstLastPara="1" rIns="0" wrap="square" tIns="0">
-            <a:spAutoFit/>
-          </a:bodyPr>
-          <a:lstStyle/>
-          <a:p>
-            <a:pPr indent="0" lvl="0" marL="0" marR="0" rtl="0" algn="l">
-              <a:spcBef>
-                <a:spcPts val="0"/>
-              </a:spcBef>
-              <a:spcAft>
-                <a:spcPts val="0"/>
-              </a:spcAft>
-              <a:buNone/>
-            </a:pPr>
-            <a:r>
-              <a:rPr lang="en-US" sz="1350">
-                <a:solidFill>
-                  <a:srgbClr val="475569"/>
-                </a:solidFill>
-                <a:latin typeface="Plus Jakarta Sans"/>
-                <a:ea typeface="Plus Jakarta Sans"/>
-                <a:cs typeface="Plus Jakarta Sans"/>
-                <a:sym typeface="Plus Jakarta Sans"/>
-              </a:rPr>
-              <a:t>Usage of GenAI tools to help with Github understanding</a:t>
-            </a:r>
-            <a:endParaRPr/>
-          </a:p>
-        </p:txBody>
-      </p:sp>
-      <p:sp>
-        <p:nvSpPr>
-          <p:cNvPr id="187" name="Google Shape;187;p9"/>
-          <p:cNvSpPr txBox="1"/>
-          <p:nvPr/>
-        </p:nvSpPr>
-        <p:spPr>
-          <a:xfrm>
-            <a:off x="6400800" y="3190875"/>
-            <a:ext cx="5572200" cy="231000"/>
-          </a:xfrm>
-          <a:prstGeom prst="rect">
-            <a:avLst/>
-          </a:prstGeom>
-          <a:noFill/>
-          <a:ln>
-            <a:noFill/>
-          </a:ln>
-        </p:spPr>
-        <p:txBody>
-          <a:bodyPr anchorCtr="0" anchor="t" bIns="0" lIns="0" spcFirstLastPara="1" rIns="0" wrap="square" tIns="0">
-            <a:spAutoFit/>
-          </a:bodyPr>
-          <a:lstStyle/>
-          <a:p>
-            <a:pPr indent="0" lvl="0" marL="0" marR="0" rtl="0" algn="l">
-              <a:spcBef>
-                <a:spcPts val="0"/>
-              </a:spcBef>
-              <a:spcAft>
-                <a:spcPts val="0"/>
-              </a:spcAft>
-              <a:buNone/>
-            </a:pPr>
-            <a:r>
-              <a:rPr b="1" lang="en-US" sz="1500">
-                <a:solidFill>
-                  <a:srgbClr val="0F172A"/>
-                </a:solidFill>
-                <a:latin typeface="Plus Jakarta Sans"/>
-                <a:ea typeface="Plus Jakarta Sans"/>
-                <a:cs typeface="Plus Jakarta Sans"/>
-                <a:sym typeface="Plus Jakarta Sans"/>
-              </a:rPr>
-              <a:t>Prioritization + dynamic work</a:t>
-            </a:r>
-            <a:endParaRPr/>
-          </a:p>
-        </p:txBody>
-      </p:sp>
-      <p:sp>
-        <p:nvSpPr>
-          <p:cNvPr id="188" name="Google Shape;188;p9"/>
-          <p:cNvSpPr txBox="1"/>
-          <p:nvPr/>
-        </p:nvSpPr>
-        <p:spPr>
-          <a:xfrm>
-            <a:off x="6400800" y="3467100"/>
-            <a:ext cx="4697400" cy="415500"/>
-          </a:xfrm>
-          <a:prstGeom prst="rect">
-            <a:avLst/>
-          </a:prstGeom>
-          <a:noFill/>
-          <a:ln>
-            <a:noFill/>
-          </a:ln>
-        </p:spPr>
-        <p:txBody>
-          <a:bodyPr anchorCtr="0" anchor="t" bIns="0" lIns="0" spcFirstLastPara="1" rIns="0" wrap="square" tIns="0">
-            <a:spAutoFit/>
-          </a:bodyPr>
-          <a:lstStyle/>
-          <a:p>
-            <a:pPr indent="0" lvl="0" marL="0" marR="0" rtl="0" algn="l">
-              <a:spcBef>
-                <a:spcPts val="0"/>
-              </a:spcBef>
-              <a:spcAft>
-                <a:spcPts val="0"/>
-              </a:spcAft>
-              <a:buNone/>
-            </a:pPr>
-            <a:r>
-              <a:rPr lang="en-US" sz="1350">
-                <a:solidFill>
-                  <a:srgbClr val="475569"/>
-                </a:solidFill>
-                <a:latin typeface="Plus Jakarta Sans"/>
-                <a:ea typeface="Plus Jakarta Sans"/>
-                <a:cs typeface="Plus Jakarta Sans"/>
-                <a:sym typeface="Plus Jakarta Sans"/>
-              </a:rPr>
-              <a:t>Knowledge</a:t>
-            </a:r>
-            <a:r>
-              <a:rPr lang="en-US" sz="1350">
-                <a:solidFill>
-                  <a:srgbClr val="475569"/>
-                </a:solidFill>
-                <a:latin typeface="Plus Jakarta Sans"/>
-                <a:ea typeface="Plus Jakarta Sans"/>
-                <a:cs typeface="Plus Jakarta Sans"/>
-                <a:sym typeface="Plus Jakarta Sans"/>
-              </a:rPr>
-              <a:t> base tasks shared likewise as a starting  base, followed by dynamic collaboration</a:t>
-            </a:r>
-            <a:endParaRPr/>
-          </a:p>
-        </p:txBody>
-      </p:sp>
-      <p:sp>
-        <p:nvSpPr>
-          <p:cNvPr id="189" name="Google Shape;189;p9"/>
-          <p:cNvSpPr txBox="1"/>
-          <p:nvPr/>
-        </p:nvSpPr>
-        <p:spPr>
-          <a:xfrm>
-            <a:off x="1333500" y="4122088"/>
-            <a:ext cx="5572200" cy="231000"/>
-          </a:xfrm>
-          <a:prstGeom prst="rect">
-            <a:avLst/>
-          </a:prstGeom>
-          <a:noFill/>
-          <a:ln>
-            <a:noFill/>
-          </a:ln>
-        </p:spPr>
-        <p:txBody>
-          <a:bodyPr anchorCtr="0" anchor="t" bIns="0" lIns="0" spcFirstLastPara="1" rIns="0" wrap="square" tIns="0">
-            <a:spAutoFit/>
-          </a:bodyPr>
-          <a:lstStyle/>
-          <a:p>
-            <a:pPr indent="0" lvl="0" marL="0" marR="0" rtl="0" algn="l">
-              <a:spcBef>
-                <a:spcPts val="0"/>
-              </a:spcBef>
-              <a:spcAft>
-                <a:spcPts val="0"/>
-              </a:spcAft>
-              <a:buNone/>
-            </a:pPr>
-            <a:r>
-              <a:rPr b="1" lang="en-US" sz="1500">
-                <a:solidFill>
-                  <a:srgbClr val="0F172A"/>
-                </a:solidFill>
-                <a:latin typeface="Plus Jakarta Sans"/>
-                <a:ea typeface="Plus Jakarta Sans"/>
-                <a:cs typeface="Plus Jakarta Sans"/>
-                <a:sym typeface="Plus Jakarta Sans"/>
-              </a:rPr>
-              <a:t>Set up and start</a:t>
-            </a:r>
-            <a:endParaRPr/>
-          </a:p>
-        </p:txBody>
-      </p:sp>
-      <p:sp>
-        <p:nvSpPr>
-          <p:cNvPr id="190" name="Google Shape;190;p9"/>
-          <p:cNvSpPr txBox="1"/>
-          <p:nvPr/>
-        </p:nvSpPr>
-        <p:spPr>
-          <a:xfrm>
-            <a:off x="1333500" y="4398313"/>
-            <a:ext cx="4457700" cy="207900"/>
-          </a:xfrm>
-          <a:prstGeom prst="rect">
-            <a:avLst/>
-          </a:prstGeom>
-          <a:noFill/>
-          <a:ln>
-            <a:noFill/>
-          </a:ln>
-        </p:spPr>
-        <p:txBody>
-          <a:bodyPr anchorCtr="0" anchor="t" bIns="0" lIns="0" spcFirstLastPara="1" rIns="0" wrap="square" tIns="0">
-            <a:spAutoFit/>
-          </a:bodyPr>
-          <a:lstStyle/>
-          <a:p>
-            <a:pPr indent="0" lvl="0" marL="0" marR="0" rtl="0" algn="l">
-              <a:spcBef>
-                <a:spcPts val="0"/>
-              </a:spcBef>
-              <a:spcAft>
-                <a:spcPts val="0"/>
-              </a:spcAft>
-              <a:buNone/>
-            </a:pPr>
-            <a:r>
-              <a:rPr lang="en-US" sz="1350">
-                <a:solidFill>
-                  <a:srgbClr val="475569"/>
-                </a:solidFill>
-                <a:latin typeface="Plus Jakarta Sans"/>
-                <a:ea typeface="Plus Jakarta Sans"/>
-                <a:cs typeface="Plus Jakarta Sans"/>
-                <a:sym typeface="Plus Jakarta Sans"/>
-              </a:rPr>
-              <a:t>Part</a:t>
-            </a:r>
-            <a:r>
-              <a:rPr lang="en-US" sz="1350">
-                <a:solidFill>
-                  <a:srgbClr val="475569"/>
-                </a:solidFill>
-                <a:latin typeface="Plus Jakarta Sans"/>
-                <a:ea typeface="Plus Jakarta Sans"/>
-                <a:cs typeface="Plus Jakarta Sans"/>
-                <a:sym typeface="Plus Jakarta Sans"/>
-              </a:rPr>
-              <a:t> of the process that took the longer</a:t>
-            </a:r>
-            <a:endParaRPr/>
-          </a:p>
-        </p:txBody>
-      </p:sp>
-      <p:sp>
-        <p:nvSpPr>
-          <p:cNvPr id="191" name="Google Shape;191;p9"/>
-          <p:cNvSpPr txBox="1"/>
-          <p:nvPr/>
-        </p:nvSpPr>
-        <p:spPr>
-          <a:xfrm>
-            <a:off x="6400763" y="4122100"/>
-            <a:ext cx="5572200" cy="231000"/>
-          </a:xfrm>
-          <a:prstGeom prst="rect">
-            <a:avLst/>
-          </a:prstGeom>
-          <a:noFill/>
-          <a:ln>
-            <a:noFill/>
-          </a:ln>
-        </p:spPr>
-        <p:txBody>
-          <a:bodyPr anchorCtr="0" anchor="t" bIns="0" lIns="0" spcFirstLastPara="1" rIns="0" wrap="square" tIns="0">
-            <a:spAutoFit/>
-          </a:bodyPr>
-          <a:lstStyle/>
-          <a:p>
-            <a:pPr indent="0" lvl="0" marL="0" marR="0" rtl="0" algn="l">
-              <a:spcBef>
-                <a:spcPts val="0"/>
-              </a:spcBef>
-              <a:spcAft>
-                <a:spcPts val="0"/>
-              </a:spcAft>
-              <a:buNone/>
-            </a:pPr>
-            <a:r>
-              <a:rPr b="1" lang="en-US" sz="1500">
-                <a:solidFill>
-                  <a:srgbClr val="0F172A"/>
-                </a:solidFill>
-                <a:latin typeface="Plus Jakarta Sans"/>
-                <a:ea typeface="Plus Jakarta Sans"/>
-                <a:cs typeface="Plus Jakarta Sans"/>
-                <a:sym typeface="Plus Jakarta Sans"/>
-              </a:rPr>
-              <a:t>Ironhack support </a:t>
-            </a:r>
-            <a:endParaRPr/>
-          </a:p>
-        </p:txBody>
-      </p:sp>
-      <p:sp>
-        <p:nvSpPr>
-          <p:cNvPr id="192" name="Google Shape;192;p9"/>
-          <p:cNvSpPr txBox="1"/>
-          <p:nvPr/>
-        </p:nvSpPr>
-        <p:spPr>
-          <a:xfrm>
-            <a:off x="6400763" y="4398325"/>
-            <a:ext cx="5572200" cy="207900"/>
-          </a:xfrm>
-          <a:prstGeom prst="rect">
-            <a:avLst/>
-          </a:prstGeom>
-          <a:noFill/>
-          <a:ln>
-            <a:noFill/>
-          </a:ln>
-        </p:spPr>
-        <p:txBody>
-          <a:bodyPr anchorCtr="0" anchor="t" bIns="0" lIns="0" spcFirstLastPara="1" rIns="0" wrap="square" tIns="0">
-            <a:spAutoFit/>
-          </a:bodyPr>
-          <a:lstStyle/>
-          <a:p>
-            <a:pPr indent="0" lvl="0" marL="0" marR="0" rtl="0" algn="l">
-              <a:spcBef>
-                <a:spcPts val="0"/>
-              </a:spcBef>
-              <a:spcAft>
-                <a:spcPts val="0"/>
-              </a:spcAft>
-              <a:buNone/>
-            </a:pPr>
-            <a:r>
-              <a:rPr lang="en-US" sz="1350">
-                <a:solidFill>
-                  <a:srgbClr val="475569"/>
-                </a:solidFill>
-                <a:latin typeface="Plus Jakarta Sans"/>
-                <a:ea typeface="Plus Jakarta Sans"/>
-                <a:cs typeface="Plus Jakarta Sans"/>
-                <a:sym typeface="Plus Jakarta Sans"/>
-              </a:rPr>
-              <a:t>Followed the bootcamp  step-by-step material</a:t>
-            </a:r>
-            <a:endParaRPr/>
-          </a:p>
-        </p:txBody>
-      </p:sp>
     </p:spTree>
   </p:cSld>
   <p:clrMapOvr>
